--- a/ADG/_실측판/06장/6장_PhysicalStandby생성_OMF방식.pptx
+++ b/ADG/_실측판/06장/6장_PhysicalStandby생성_OMF방식.pptx
@@ -5758,7 +5758,17 @@
                 </a:solidFill>
                 <a:latin typeface="맑은 고딕"/>
               </a:rPr>
-              <a:t>•  OMF 이름 : `o1_mf_system_1b50qfn7_.dbf`</a:t>
+              <a:t>•  OMF 이름 : </a:t>
+            </a:r>
+            <a:r>
+              <a:rPr sz="1700" b="0">
+                <a:solidFill>
+                  <a:srgbClr val="222222"/>
+                </a:solidFill>
+                <a:latin typeface="Consolas"/>
+                <a:cs typeface="Consolas"/>
+              </a:rPr>
+              <a:t>o1_mf_system_1b50qfn7_.dbf</a:t>
             </a:r>
           </a:p>
           <a:p>
@@ -5774,7 +5784,26 @@
                 </a:solidFill>
                 <a:latin typeface="맑은 고딕"/>
               </a:rPr>
-              <a:t>•  `1b50qfn7` — 매번 새로 생성되는 유일 문자열</a:t>
+              <a:t>•  </a:t>
+            </a:r>
+            <a:r>
+              <a:rPr sz="1700" b="0">
+                <a:solidFill>
+                  <a:srgbClr val="222222"/>
+                </a:solidFill>
+                <a:latin typeface="Consolas"/>
+                <a:cs typeface="Consolas"/>
+              </a:rPr>
+              <a:t>1b50qfn7</a:t>
+            </a:r>
+            <a:r>
+              <a:rPr sz="1700" b="0">
+                <a:solidFill>
+                  <a:srgbClr val="222222"/>
+                </a:solidFill>
+                <a:latin typeface="맑은 고딕"/>
+              </a:rPr>
+              <a:t> — 매번 새로 생성되는 유일 문자열</a:t>
             </a:r>
           </a:p>
           <a:p>
@@ -6240,7 +6269,17 @@
                 </a:solidFill>
                 <a:latin typeface="맑은 고딕"/>
               </a:rPr>
-              <a:t>•  `db_create_file_dest=/u03/nosuchdir`</a:t>
+              <a:t>•  </a:t>
+            </a:r>
+            <a:r>
+              <a:rPr sz="1700" b="0">
+                <a:solidFill>
+                  <a:srgbClr val="222222"/>
+                </a:solidFill>
+                <a:latin typeface="Consolas"/>
+                <a:cs typeface="Consolas"/>
+              </a:rPr>
+              <a:t>db_create_file_dest=/u03/nosuchdir</a:t>
             </a:r>
           </a:p>
           <a:p>
@@ -6256,7 +6295,26 @@
                 </a:solidFill>
                 <a:latin typeface="맑은 고딕"/>
               </a:rPr>
-              <a:t>•  `ORA-01261` 값을 경로로 해석할 수 없다</a:t>
+              <a:t>•  </a:t>
+            </a:r>
+            <a:r>
+              <a:rPr sz="1700" b="0">
+                <a:solidFill>
+                  <a:srgbClr val="222222"/>
+                </a:solidFill>
+                <a:latin typeface="Consolas"/>
+                <a:cs typeface="Consolas"/>
+              </a:rPr>
+              <a:t>ORA-01261</a:t>
+            </a:r>
+            <a:r>
+              <a:rPr sz="1700" b="0">
+                <a:solidFill>
+                  <a:srgbClr val="222222"/>
+                </a:solidFill>
+                <a:latin typeface="맑은 고딕"/>
+              </a:rPr>
+              <a:t> 값을 경로로 해석할 수 없다</a:t>
             </a:r>
           </a:p>
           <a:p>
@@ -6272,7 +6330,26 @@
                 </a:solidFill>
                 <a:latin typeface="맑은 고딕"/>
               </a:rPr>
-              <a:t>•  `ORA-01262` stat() 실패</a:t>
+              <a:t>•  </a:t>
+            </a:r>
+            <a:r>
+              <a:rPr sz="1700" b="0">
+                <a:solidFill>
+                  <a:srgbClr val="222222"/>
+                </a:solidFill>
+                <a:latin typeface="Consolas"/>
+                <a:cs typeface="Consolas"/>
+              </a:rPr>
+              <a:t>ORA-01262</a:t>
+            </a:r>
+            <a:r>
+              <a:rPr sz="1700" b="0">
+                <a:solidFill>
+                  <a:srgbClr val="222222"/>
+                </a:solidFill>
+                <a:latin typeface="맑은 고딕"/>
+              </a:rPr>
+              <a:t> stat() 실패</a:t>
             </a:r>
           </a:p>
           <a:p>
@@ -6288,7 +6365,26 @@
                 </a:solidFill>
                 <a:latin typeface="맑은 고딕"/>
               </a:rPr>
-              <a:t>•  `Linux-x86_64 Error: 2` ENOENT — 운영체제 오류 번호가 그대로</a:t>
+              <a:t>•  </a:t>
+            </a:r>
+            <a:r>
+              <a:rPr sz="1700" b="0">
+                <a:solidFill>
+                  <a:srgbClr val="222222"/>
+                </a:solidFill>
+                <a:latin typeface="Consolas"/>
+                <a:cs typeface="Consolas"/>
+              </a:rPr>
+              <a:t>Linux-x86_64 Error: 2</a:t>
+            </a:r>
+            <a:r>
+              <a:rPr sz="1700" b="0">
+                <a:solidFill>
+                  <a:srgbClr val="222222"/>
+                </a:solidFill>
+                <a:latin typeface="맑은 고딕"/>
+              </a:rPr>
+              <a:t> ENOENT — 운영체제 오류 번호가 그대로</a:t>
             </a:r>
           </a:p>
           <a:p>
@@ -6304,7 +6400,26 @@
                 </a:solidFill>
                 <a:latin typeface="맑은 고딕"/>
               </a:rPr>
-              <a:t>•  `ORA-01034` 결과적으로 인스턴스가 없다</a:t>
+              <a:t>•  </a:t>
+            </a:r>
+            <a:r>
+              <a:rPr sz="1700" b="0">
+                <a:solidFill>
+                  <a:srgbClr val="222222"/>
+                </a:solidFill>
+                <a:latin typeface="Consolas"/>
+                <a:cs typeface="Consolas"/>
+              </a:rPr>
+              <a:t>ORA-01034</a:t>
+            </a:r>
+            <a:r>
+              <a:rPr sz="1700" b="0">
+                <a:solidFill>
+                  <a:srgbClr val="222222"/>
+                </a:solidFill>
+                <a:latin typeface="맑은 고딕"/>
+              </a:rPr>
+              <a:t> 결과적으로 인스턴스가 없다</a:t>
             </a:r>
           </a:p>
         </p:txBody>
@@ -6483,7 +6598,37 @@
                 </a:solidFill>
                 <a:latin typeface="맑은 고딕"/>
               </a:rPr>
-              <a:t>•  `RMAN-03002: failure of **allocate** command`</a:t>
+              <a:t>•  </a:t>
+            </a:r>
+            <a:r>
+              <a:rPr sz="1700" b="0">
+                <a:solidFill>
+                  <a:srgbClr val="222222"/>
+                </a:solidFill>
+                <a:latin typeface="Consolas"/>
+                <a:cs typeface="Consolas"/>
+              </a:rPr>
+              <a:t>RMAN-03002: failure of </a:t>
+            </a:r>
+            <a:r>
+              <a:rPr sz="1700" b="1">
+                <a:solidFill>
+                  <a:srgbClr val="222222"/>
+                </a:solidFill>
+                <a:latin typeface="Consolas"/>
+                <a:cs typeface="Consolas"/>
+              </a:rPr>
+              <a:t>allocate</a:t>
+            </a:r>
+            <a:r>
+              <a:rPr sz="1700" b="0">
+                <a:solidFill>
+                  <a:srgbClr val="222222"/>
+                </a:solidFill>
+                <a:latin typeface="Consolas"/>
+                <a:cs typeface="Consolas"/>
+              </a:rPr>
+              <a:t> command</a:t>
             </a:r>
           </a:p>
           <a:p>
@@ -6499,7 +6644,26 @@
                 </a:solidFill>
                 <a:latin typeface="맑은 고딕"/>
               </a:rPr>
-              <a:t>•  5장은 모두 `failure of Duplicate Db command`였다</a:t>
+              <a:t>•  5장은 모두 </a:t>
+            </a:r>
+            <a:r>
+              <a:rPr sz="1700" b="0">
+                <a:solidFill>
+                  <a:srgbClr val="222222"/>
+                </a:solidFill>
+                <a:latin typeface="Consolas"/>
+                <a:cs typeface="Consolas"/>
+              </a:rPr>
+              <a:t>failure of Duplicate Db command</a:t>
+            </a:r>
+            <a:r>
+              <a:rPr sz="1700" b="0">
+                <a:solidFill>
+                  <a:srgbClr val="222222"/>
+                </a:solidFill>
+                <a:latin typeface="맑은 고딕"/>
+              </a:rPr>
+              <a:t>였다</a:t>
             </a:r>
           </a:p>
           <a:p>
@@ -6515,7 +6679,26 @@
                 </a:solidFill>
                 <a:latin typeface="맑은 고딕"/>
               </a:rPr>
-              <a:t>•  `RMAN-06403` 접속을 얻지 못했다</a:t>
+              <a:t>•  </a:t>
+            </a:r>
+            <a:r>
+              <a:rPr sz="1700" b="0">
+                <a:solidFill>
+                  <a:srgbClr val="222222"/>
+                </a:solidFill>
+                <a:latin typeface="Consolas"/>
+                <a:cs typeface="Consolas"/>
+              </a:rPr>
+              <a:t>RMAN-06403</a:t>
+            </a:r>
+            <a:r>
+              <a:rPr sz="1700" b="0">
+                <a:solidFill>
+                  <a:srgbClr val="222222"/>
+                </a:solidFill>
+                <a:latin typeface="맑은 고딕"/>
+              </a:rPr>
+              <a:t> 접속을 얻지 못했다</a:t>
             </a:r>
           </a:p>
           <a:p>
@@ -6531,7 +6714,35 @@
                 </a:solidFill>
                 <a:latin typeface="맑은 고딕"/>
               </a:rPr>
-              <a:t>•  `ORA-27101: shared memory realm does not exist` — **SGA가 없다**</a:t>
+              <a:t>•  </a:t>
+            </a:r>
+            <a:r>
+              <a:rPr sz="1700" b="0">
+                <a:solidFill>
+                  <a:srgbClr val="222222"/>
+                </a:solidFill>
+                <a:latin typeface="Consolas"/>
+                <a:cs typeface="Consolas"/>
+              </a:rPr>
+              <a:t>ORA-27101: shared memory realm does not exist</a:t>
+            </a:r>
+            <a:r>
+              <a:rPr sz="1700" b="0">
+                <a:solidFill>
+                  <a:srgbClr val="222222"/>
+                </a:solidFill>
+                <a:latin typeface="맑은 고딕"/>
+              </a:rPr>
+              <a:t> — </a:t>
+            </a:r>
+            <a:r>
+              <a:rPr sz="1700" b="1">
+                <a:solidFill>
+                  <a:srgbClr val="222222"/>
+                </a:solidFill>
+                <a:latin typeface="맑은 고딕"/>
+              </a:rPr>
+              <a:t>SGA가 없다</a:t>
             </a:r>
           </a:p>
         </p:txBody>
@@ -6710,7 +6921,26 @@
                 </a:solidFill>
                 <a:latin typeface="맑은 고딕"/>
               </a:rPr>
-              <a:t>•  `db_create_file_dest`도 convert도 주지 않으면</a:t>
+              <a:t>•  </a:t>
+            </a:r>
+            <a:r>
+              <a:rPr sz="1700" b="0">
+                <a:solidFill>
+                  <a:srgbClr val="222222"/>
+                </a:solidFill>
+                <a:latin typeface="Consolas"/>
+                <a:cs typeface="Consolas"/>
+              </a:rPr>
+              <a:t>db_create_file_dest</a:t>
+            </a:r>
+            <a:r>
+              <a:rPr sz="1700" b="0">
+                <a:solidFill>
+                  <a:srgbClr val="222222"/>
+                </a:solidFill>
+                <a:latin typeface="맑은 고딕"/>
+              </a:rPr>
+              <a:t>도 convert도 주지 않으면</a:t>
             </a:r>
           </a:p>
           <a:p>
@@ -6726,7 +6956,17 @@
                 </a:solidFill>
                 <a:latin typeface="맑은 고딕"/>
               </a:rPr>
-              <a:t>•  `RMAN-05538: warning: implicitly using DB_FILE_NAME_CONVERT`</a:t>
+              <a:t>•  </a:t>
+            </a:r>
+            <a:r>
+              <a:rPr sz="1700" b="0">
+                <a:solidFill>
+                  <a:srgbClr val="222222"/>
+                </a:solidFill>
+                <a:latin typeface="Consolas"/>
+                <a:cs typeface="Consolas"/>
+              </a:rPr>
+              <a:t>RMAN-05538: warning: implicitly using DB_FILE_NAME_CONVERT</a:t>
             </a:r>
           </a:p>
           <a:p>
@@ -6742,7 +6982,36 @@
                 </a:solidFill>
                 <a:latin typeface="맑은 고딕"/>
               </a:rPr>
-              <a:t>•  `RMAN-05001` 11줄, 경로는 전부 `.../Chicago/...`</a:t>
+              <a:t>•  </a:t>
+            </a:r>
+            <a:r>
+              <a:rPr sz="1700" b="0">
+                <a:solidFill>
+                  <a:srgbClr val="222222"/>
+                </a:solidFill>
+                <a:latin typeface="Consolas"/>
+                <a:cs typeface="Consolas"/>
+              </a:rPr>
+              <a:t>RMAN-05001</a:t>
+            </a:r>
+            <a:r>
+              <a:rPr sz="1700" b="0">
+                <a:solidFill>
+                  <a:srgbClr val="222222"/>
+                </a:solidFill>
+                <a:latin typeface="맑은 고딕"/>
+              </a:rPr>
+              <a:t> 11줄, 경로는 전부 </a:t>
+            </a:r>
+            <a:r>
+              <a:rPr sz="1700" b="0">
+                <a:solidFill>
+                  <a:srgbClr val="222222"/>
+                </a:solidFill>
+                <a:latin typeface="Consolas"/>
+                <a:cs typeface="Consolas"/>
+              </a:rPr>
+              <a:t>.../Chicago/...</a:t>
             </a:r>
           </a:p>
           <a:p>
@@ -6758,7 +7027,16 @@
                 </a:solidFill>
                 <a:latin typeface="맑은 고딕"/>
               </a:rPr>
-              <a:t>•  5장 첫 번째 실패와 **완전히 동일**</a:t>
+              <a:t>•  5장 첫 번째 실패와 </a:t>
+            </a:r>
+            <a:r>
+              <a:rPr sz="1700" b="1">
+                <a:solidFill>
+                  <a:srgbClr val="222222"/>
+                </a:solidFill>
+                <a:latin typeface="맑은 고딕"/>
+              </a:rPr>
+              <a:t>완전히 동일</a:t>
             </a:r>
           </a:p>
         </p:txBody>
@@ -6953,7 +7231,16 @@
                 </a:solidFill>
                 <a:latin typeface="맑은 고딕"/>
               </a:rPr>
-              <a:t>•  6장 : 인스턴스 기동 전 또는 마운트 직후 실패 → **잔재 없음**</a:t>
+              <a:t>•  6장 : 인스턴스 기동 전 또는 마운트 직후 실패 → </a:t>
+            </a:r>
+            <a:r>
+              <a:rPr sz="1700" b="1">
+                <a:solidFill>
+                  <a:srgbClr val="222222"/>
+                </a:solidFill>
+                <a:latin typeface="맑은 고딕"/>
+              </a:rPr>
+              <a:t>잔재 없음</a:t>
             </a:r>
           </a:p>
           <a:p>
@@ -6969,7 +7256,26 @@
                 </a:solidFill>
                 <a:latin typeface="맑은 고딕"/>
               </a:rPr>
-              <a:t>•  근거 : `DB_CREATE_FILE_DEST`는 stat()으로 검증된다</a:t>
+              <a:t>•  근거 : </a:t>
+            </a:r>
+            <a:r>
+              <a:rPr sz="1700" b="0">
+                <a:solidFill>
+                  <a:srgbClr val="222222"/>
+                </a:solidFill>
+                <a:latin typeface="Consolas"/>
+                <a:cs typeface="Consolas"/>
+              </a:rPr>
+              <a:t>DB_CREATE_FILE_DEST</a:t>
+            </a:r>
+            <a:r>
+              <a:rPr sz="1700" b="0">
+                <a:solidFill>
+                  <a:srgbClr val="222222"/>
+                </a:solidFill>
+                <a:latin typeface="맑은 고딕"/>
+              </a:rPr>
+              <a:t>는 stat()으로 검증된다</a:t>
             </a:r>
           </a:p>
           <a:p>
@@ -7419,7 +7725,17 @@
                 </a:solidFill>
                 <a:latin typeface="맑은 고딕"/>
               </a:rPr>
-              <a:t>•  `rc=0`</a:t>
+              <a:t>•  </a:t>
+            </a:r>
+            <a:r>
+              <a:rPr sz="1700" b="0">
+                <a:solidFill>
+                  <a:srgbClr val="222222"/>
+                </a:solidFill>
+                <a:latin typeface="Consolas"/>
+                <a:cs typeface="Consolas"/>
+              </a:rPr>
+              <a:t>rc=0</a:t>
             </a:r>
           </a:p>
           <a:p>
@@ -7435,7 +7751,35 @@
                 </a:solidFill>
                 <a:latin typeface="맑은 고딕"/>
               </a:rPr>
-              <a:t>•  `grep -cE 'RMAN-|ORA-'` = **0**</a:t>
+              <a:t>•  </a:t>
+            </a:r>
+            <a:r>
+              <a:rPr sz="1700" b="0">
+                <a:solidFill>
+                  <a:srgbClr val="222222"/>
+                </a:solidFill>
+                <a:latin typeface="Consolas"/>
+                <a:cs typeface="Consolas"/>
+              </a:rPr>
+              <a:t>grep -cE 'RMAN-|ORA-'</a:t>
+            </a:r>
+            <a:r>
+              <a:rPr sz="1700" b="0">
+                <a:solidFill>
+                  <a:srgbClr val="222222"/>
+                </a:solidFill>
+                <a:latin typeface="맑은 고딕"/>
+              </a:rPr>
+              <a:t> = </a:t>
+            </a:r>
+            <a:r>
+              <a:rPr sz="1700" b="1">
+                <a:solidFill>
+                  <a:srgbClr val="222222"/>
+                </a:solidFill>
+                <a:latin typeface="맑은 고딕"/>
+              </a:rPr>
+              <a:t>0</a:t>
             </a:r>
           </a:p>
           <a:p>
@@ -7451,7 +7795,26 @@
                 </a:solidFill>
                 <a:latin typeface="맑은 고딕"/>
               </a:rPr>
-              <a:t>•  `Finished Duplicate Db` 존재</a:t>
+              <a:t>•  </a:t>
+            </a:r>
+            <a:r>
+              <a:rPr sz="1700" b="0">
+                <a:solidFill>
+                  <a:srgbClr val="222222"/>
+                </a:solidFill>
+                <a:latin typeface="Consolas"/>
+                <a:cs typeface="Consolas"/>
+              </a:rPr>
+              <a:t>Finished Duplicate Db</a:t>
+            </a:r>
+            <a:r>
+              <a:rPr sz="1700" b="0">
+                <a:solidFill>
+                  <a:srgbClr val="222222"/>
+                </a:solidFill>
+                <a:latin typeface="맑은 고딕"/>
+              </a:rPr>
+              <a:t> 존재</a:t>
             </a:r>
           </a:p>
           <a:p>
@@ -7646,7 +8009,17 @@
                 </a:solidFill>
                 <a:latin typeface="맑은 고딕"/>
               </a:rPr>
-              <a:t>•  `input  .../Chicago/sysaux01.dbf`</a:t>
+              <a:t>•  </a:t>
+            </a:r>
+            <a:r>
+              <a:rPr sz="1700" b="0">
+                <a:solidFill>
+                  <a:srgbClr val="222222"/>
+                </a:solidFill>
+                <a:latin typeface="Consolas"/>
+                <a:cs typeface="Consolas"/>
+              </a:rPr>
+              <a:t>input  .../Chicago/sysaux01.dbf</a:t>
             </a:r>
           </a:p>
           <a:p>
@@ -7662,7 +8035,17 @@
                 </a:solidFill>
                 <a:latin typeface="맑은 고딕"/>
               </a:rPr>
-              <a:t>•  `output .../BOSTON/datafile/o1_mf_sysaux_1c50qfn7_.dbf`</a:t>
+              <a:t>•  </a:t>
+            </a:r>
+            <a:r>
+              <a:rPr sz="1700" b="0">
+                <a:solidFill>
+                  <a:srgbClr val="222222"/>
+                </a:solidFill>
+                <a:latin typeface="Consolas"/>
+                <a:cs typeface="Consolas"/>
+              </a:rPr>
+              <a:t>output .../BOSTON/datafile/o1_mf_sysaux_1c50qfn7_.dbf</a:t>
             </a:r>
           </a:p>
           <a:p>
@@ -7889,7 +8272,17 @@
                 </a:solidFill>
                 <a:latin typeface="맑은 고딕"/>
               </a:rPr>
-              <a:t>•  `RMAN-05537: ... auxiliary instance is started with spfile cannot use SPFILE clause`</a:t>
+              <a:t>•  </a:t>
+            </a:r>
+            <a:r>
+              <a:rPr sz="1700" b="0">
+                <a:solidFill>
+                  <a:srgbClr val="222222"/>
+                </a:solidFill>
+                <a:latin typeface="Consolas"/>
+                <a:cs typeface="Consolas"/>
+              </a:rPr>
+              <a:t>RMAN-05537: ... auxiliary instance is started with spfile cannot use SPFILE clause</a:t>
             </a:r>
           </a:p>
           <a:p>
@@ -7905,7 +8298,16 @@
                 </a:solidFill>
                 <a:latin typeface="맑은 고딕"/>
               </a:rPr>
-              <a:t>•  5장의 RMAN-05500(마운트 상태)과 **다른 오류**</a:t>
+              <a:t>•  5장의 RMAN-05500(마운트 상태)과 </a:t>
+            </a:r>
+            <a:r>
+              <a:rPr sz="1700" b="1">
+                <a:solidFill>
+                  <a:srgbClr val="222222"/>
+                </a:solidFill>
+                <a:latin typeface="맑은 고딕"/>
+              </a:rPr>
+              <a:t>다른 오류</a:t>
             </a:r>
           </a:p>
           <a:p>
@@ -8093,7 +8495,26 @@
                 </a:solidFill>
                 <a:latin typeface="맑은 고딕"/>
               </a:rPr>
-              <a:t>•  `DB_CREATE_FILE_DEST`가 잘못됐을 때와 없을 때의 오류를 구분한다.</a:t>
+              <a:t>•  </a:t>
+            </a:r>
+            <a:r>
+              <a:rPr sz="1600" b="0">
+                <a:solidFill>
+                  <a:srgbClr val="222222"/>
+                </a:solidFill>
+                <a:latin typeface="Consolas"/>
+                <a:cs typeface="Consolas"/>
+              </a:rPr>
+              <a:t>DB_CREATE_FILE_DEST</a:t>
+            </a:r>
+            <a:r>
+              <a:rPr sz="1600" b="0">
+                <a:solidFill>
+                  <a:srgbClr val="222222"/>
+                </a:solidFill>
+                <a:latin typeface="맑은 고딕"/>
+              </a:rPr>
+              <a:t>가 잘못됐을 때와 없을 때의 오류를 구분한다.</a:t>
             </a:r>
           </a:p>
           <a:p>
@@ -8591,7 +9012,17 @@
                 </a:solidFill>
                 <a:latin typeface="맑은 고딕"/>
               </a:rPr>
-              <a:t>•  `/u03/app/oracle/oradata/BOSTON/`</a:t>
+              <a:t>•  </a:t>
+            </a:r>
+            <a:r>
+              <a:rPr sz="1700" b="0">
+                <a:solidFill>
+                  <a:srgbClr val="222222"/>
+                </a:solidFill>
+                <a:latin typeface="Consolas"/>
+                <a:cs typeface="Consolas"/>
+              </a:rPr>
+              <a:t>/u03/app/oracle/oradata/BOSTON/</a:t>
             </a:r>
           </a:p>
           <a:p>
@@ -8607,7 +9038,36 @@
                 </a:solidFill>
                 <a:latin typeface="맑은 고딕"/>
               </a:rPr>
-              <a:t>•  `BOSTON/datafile` · `BOSTON/onlinelog`</a:t>
+              <a:t>•  </a:t>
+            </a:r>
+            <a:r>
+              <a:rPr sz="1700" b="0">
+                <a:solidFill>
+                  <a:srgbClr val="222222"/>
+                </a:solidFill>
+                <a:latin typeface="Consolas"/>
+                <a:cs typeface="Consolas"/>
+              </a:rPr>
+              <a:t>BOSTON/datafile</a:t>
+            </a:r>
+            <a:r>
+              <a:rPr sz="1700" b="0">
+                <a:solidFill>
+                  <a:srgbClr val="222222"/>
+                </a:solidFill>
+                <a:latin typeface="맑은 고딕"/>
+              </a:rPr>
+              <a:t> · </a:t>
+            </a:r>
+            <a:r>
+              <a:rPr sz="1700" b="0">
+                <a:solidFill>
+                  <a:srgbClr val="222222"/>
+                </a:solidFill>
+                <a:latin typeface="Consolas"/>
+                <a:cs typeface="Consolas"/>
+              </a:rPr>
+              <a:t>BOSTON/onlinelog</a:t>
             </a:r>
           </a:p>
           <a:p>
@@ -8623,7 +9083,17 @@
                 </a:solidFill>
                 <a:latin typeface="맑은 고딕"/>
               </a:rPr>
-              <a:t>•  `BOSTON/59F036501C3B321DE0633CE110ACEFEB/datafile`</a:t>
+              <a:t>•  </a:t>
+            </a:r>
+            <a:r>
+              <a:rPr sz="1700" b="0">
+                <a:solidFill>
+                  <a:srgbClr val="222222"/>
+                </a:solidFill>
+                <a:latin typeface="Consolas"/>
+                <a:cs typeface="Consolas"/>
+              </a:rPr>
+              <a:t>BOSTON/59F036501C3B321DE0633CE110ACEFEB/datafile</a:t>
             </a:r>
           </a:p>
           <a:p>
@@ -8639,7 +9109,17 @@
                 </a:solidFill>
                 <a:latin typeface="맑은 고딕"/>
               </a:rPr>
-              <a:t>•  `BOSTON/59F053E76FBD3BA1E0633CE110ACE7E5/datafile`</a:t>
+              <a:t>•  </a:t>
+            </a:r>
+            <a:r>
+              <a:rPr sz="1700" b="0">
+                <a:solidFill>
+                  <a:srgbClr val="222222"/>
+                </a:solidFill>
+                <a:latin typeface="Consolas"/>
+                <a:cs typeface="Consolas"/>
+              </a:rPr>
+              <a:t>BOSTON/59F053E76FBD3BA1E0633CE110ACE7E5/datafile</a:t>
             </a:r>
           </a:p>
         </p:txBody>
@@ -8818,7 +9298,36 @@
                 </a:solidFill>
                 <a:latin typeface="맑은 고딕"/>
               </a:rPr>
-              <a:t>•  `DB_NAME`을 썼다면 Standby 디렉터리도 `CHICAGO`</a:t>
+              <a:t>•  </a:t>
+            </a:r>
+            <a:r>
+              <a:rPr sz="1700" b="0">
+                <a:solidFill>
+                  <a:srgbClr val="222222"/>
+                </a:solidFill>
+                <a:latin typeface="Consolas"/>
+                <a:cs typeface="Consolas"/>
+              </a:rPr>
+              <a:t>DB_NAME</a:t>
+            </a:r>
+            <a:r>
+              <a:rPr sz="1700" b="0">
+                <a:solidFill>
+                  <a:srgbClr val="222222"/>
+                </a:solidFill>
+                <a:latin typeface="맑은 고딕"/>
+              </a:rPr>
+              <a:t>을 썼다면 Standby 디렉터리도 </a:t>
+            </a:r>
+            <a:r>
+              <a:rPr sz="1700" b="0">
+                <a:solidFill>
+                  <a:srgbClr val="222222"/>
+                </a:solidFill>
+                <a:latin typeface="Consolas"/>
+                <a:cs typeface="Consolas"/>
+              </a:rPr>
+              <a:t>CHICAGO</a:t>
             </a:r>
           </a:p>
           <a:p>
@@ -8866,7 +9375,26 @@
                 </a:solidFill>
                 <a:latin typeface="맑은 고딕"/>
               </a:rPr>
-              <a:t>•  `DB_UNIQUE_NAME`만 다르게 주면 자동 분리</a:t>
+              <a:t>•  </a:t>
+            </a:r>
+            <a:r>
+              <a:rPr sz="1700" b="0">
+                <a:solidFill>
+                  <a:srgbClr val="222222"/>
+                </a:solidFill>
+                <a:latin typeface="Consolas"/>
+                <a:cs typeface="Consolas"/>
+              </a:rPr>
+              <a:t>DB_UNIQUE_NAME</a:t>
+            </a:r>
+            <a:r>
+              <a:rPr sz="1700" b="0">
+                <a:solidFill>
+                  <a:srgbClr val="222222"/>
+                </a:solidFill>
+                <a:latin typeface="맑은 고딕"/>
+              </a:rPr>
+              <a:t>만 다르게 주면 자동 분리</a:t>
             </a:r>
           </a:p>
         </p:txBody>
@@ -9045,7 +9573,26 @@
                 </a:solidFill>
                 <a:latin typeface="맑은 고딕"/>
               </a:rPr>
-              <a:t>•  `V$PDBS.GUID`와 디렉터리 이름이 일치한다</a:t>
+              <a:t>•  </a:t>
+            </a:r>
+            <a:r>
+              <a:rPr sz="1700" b="0">
+                <a:solidFill>
+                  <a:srgbClr val="222222"/>
+                </a:solidFill>
+                <a:latin typeface="Consolas"/>
+                <a:cs typeface="Consolas"/>
+              </a:rPr>
+              <a:t>V$PDBS.GUID</a:t>
+            </a:r>
+            <a:r>
+              <a:rPr sz="1700" b="0">
+                <a:solidFill>
+                  <a:srgbClr val="222222"/>
+                </a:solidFill>
+                <a:latin typeface="맑은 고딕"/>
+              </a:rPr>
+              <a:t>와 디렉터리 이름이 일치한다</a:t>
             </a:r>
           </a:p>
           <a:p>
@@ -9061,7 +9608,45 @@
                 </a:solidFill>
                 <a:latin typeface="맑은 고딕"/>
               </a:rPr>
-              <a:t>•  `59F0365...` = PDB$SEED / `59F053E...` = CHICAGO_PDB1</a:t>
+              <a:t>•  </a:t>
+            </a:r>
+            <a:r>
+              <a:rPr sz="1700" b="0">
+                <a:solidFill>
+                  <a:srgbClr val="222222"/>
+                </a:solidFill>
+                <a:latin typeface="Consolas"/>
+                <a:cs typeface="Consolas"/>
+              </a:rPr>
+              <a:t>59F0365...</a:t>
+            </a:r>
+            <a:r>
+              <a:rPr sz="1700" b="0">
+                <a:solidFill>
+                  <a:srgbClr val="222222"/>
+                </a:solidFill>
+                <a:latin typeface="맑은 고딕"/>
+              </a:rPr>
+              <a:t> = PDB$SEED / </a:t>
+            </a:r>
+            <a:r>
+              <a:rPr sz="1700" b="0">
+                <a:solidFill>
+                  <a:srgbClr val="222222"/>
+                </a:solidFill>
+                <a:latin typeface="Consolas"/>
+                <a:cs typeface="Consolas"/>
+              </a:rPr>
+              <a:t>59F053E...</a:t>
+            </a:r>
+            <a:r>
+              <a:rPr sz="1700" b="0">
+                <a:solidFill>
+                  <a:srgbClr val="222222"/>
+                </a:solidFill>
+                <a:latin typeface="맑은 고딕"/>
+              </a:rPr>
+              <a:t> = CHICAGO_PDB1</a:t>
             </a:r>
           </a:p>
           <a:p>
@@ -9077,7 +9662,16 @@
                 </a:solidFill>
                 <a:latin typeface="맑은 고딕"/>
               </a:rPr>
-              <a:t>•  **Primary와 Standby의 GUID가 완전히 같다**</a:t>
+              <a:t>•  </a:t>
+            </a:r>
+            <a:r>
+              <a:rPr sz="1700" b="1">
+                <a:solidFill>
+                  <a:srgbClr val="222222"/>
+                </a:solidFill>
+                <a:latin typeface="맑은 고딕"/>
+              </a:rPr>
+              <a:t>Primary와 Standby의 GUID가 완전히 같다</a:t>
             </a:r>
           </a:p>
           <a:p>
@@ -9272,7 +9866,26 @@
                 </a:solidFill>
                 <a:latin typeface="맑은 고딕"/>
               </a:rPr>
-              <a:t>•  `o1_mf` OMF 고정 접두어</a:t>
+              <a:t>•  </a:t>
+            </a:r>
+            <a:r>
+              <a:rPr sz="1700" b="0">
+                <a:solidFill>
+                  <a:srgbClr val="222222"/>
+                </a:solidFill>
+                <a:latin typeface="Consolas"/>
+                <a:cs typeface="Consolas"/>
+              </a:rPr>
+              <a:t>o1_mf</a:t>
+            </a:r>
+            <a:r>
+              <a:rPr sz="1700" b="0">
+                <a:solidFill>
+                  <a:srgbClr val="222222"/>
+                </a:solidFill>
+                <a:latin typeface="맑은 고딕"/>
+              </a:rPr>
+              <a:t> OMF 고정 접두어</a:t>
             </a:r>
           </a:p>
           <a:p>
@@ -9288,7 +9901,26 @@
                 </a:solidFill>
                 <a:latin typeface="맑은 고딕"/>
               </a:rPr>
-              <a:t>•  `sysaux` 테이블스페이스 이름 (로그는 그룹 번호)</a:t>
+              <a:t>•  </a:t>
+            </a:r>
+            <a:r>
+              <a:rPr sz="1700" b="0">
+                <a:solidFill>
+                  <a:srgbClr val="222222"/>
+                </a:solidFill>
+                <a:latin typeface="Consolas"/>
+                <a:cs typeface="Consolas"/>
+              </a:rPr>
+              <a:t>sysaux</a:t>
+            </a:r>
+            <a:r>
+              <a:rPr sz="1700" b="0">
+                <a:solidFill>
+                  <a:srgbClr val="222222"/>
+                </a:solidFill>
+                <a:latin typeface="맑은 고딕"/>
+              </a:rPr>
+              <a:t> 테이블스페이스 이름 (로그는 그룹 번호)</a:t>
             </a:r>
           </a:p>
           <a:p>
@@ -9304,7 +9936,26 @@
                 </a:solidFill>
                 <a:latin typeface="맑은 고딕"/>
               </a:rPr>
-              <a:t>•  `1c50qfn7` 유일 문자열 — 매번 다르다</a:t>
+              <a:t>•  </a:t>
+            </a:r>
+            <a:r>
+              <a:rPr sz="1700" b="0">
+                <a:solidFill>
+                  <a:srgbClr val="222222"/>
+                </a:solidFill>
+                <a:latin typeface="Consolas"/>
+                <a:cs typeface="Consolas"/>
+              </a:rPr>
+              <a:t>1c50qfn7</a:t>
+            </a:r>
+            <a:r>
+              <a:rPr sz="1700" b="0">
+                <a:solidFill>
+                  <a:srgbClr val="222222"/>
+                </a:solidFill>
+                <a:latin typeface="맑은 고딕"/>
+              </a:rPr>
+              <a:t> 유일 문자열 — 매번 다르다</a:t>
             </a:r>
           </a:p>
           <a:p>
@@ -9320,7 +9971,64 @@
                 </a:solidFill>
                 <a:latin typeface="맑은 고딕"/>
               </a:rPr>
-              <a:t>•  `.dbf` 데이터 / `.log` 로그 / `.tmp` 임시</a:t>
+              <a:t>•  </a:t>
+            </a:r>
+            <a:r>
+              <a:rPr sz="1700" b="0">
+                <a:solidFill>
+                  <a:srgbClr val="222222"/>
+                </a:solidFill>
+                <a:latin typeface="Consolas"/>
+                <a:cs typeface="Consolas"/>
+              </a:rPr>
+              <a:t>.dbf</a:t>
+            </a:r>
+            <a:r>
+              <a:rPr sz="1700" b="0">
+                <a:solidFill>
+                  <a:srgbClr val="222222"/>
+                </a:solidFill>
+                <a:latin typeface="맑은 고딕"/>
+              </a:rPr>
+              <a:t> 데이터 / </a:t>
+            </a:r>
+            <a:r>
+              <a:rPr sz="1700" b="0">
+                <a:solidFill>
+                  <a:srgbClr val="222222"/>
+                </a:solidFill>
+                <a:latin typeface="Consolas"/>
+                <a:cs typeface="Consolas"/>
+              </a:rPr>
+              <a:t>.log</a:t>
+            </a:r>
+            <a:r>
+              <a:rPr sz="1700" b="0">
+                <a:solidFill>
+                  <a:srgbClr val="222222"/>
+                </a:solidFill>
+                <a:latin typeface="맑은 고딕"/>
+              </a:rPr>
+              <a:t> 로그 / </a:t>
+            </a:r>
+            <a:r>
+              <a:rPr sz="1700" b="0">
+                <a:solidFill>
+                  <a:srgbClr val="222222"/>
+                </a:solidFill>
+                <a:latin typeface="Consolas"/>
+                <a:cs typeface="Consolas"/>
+              </a:rPr>
+              <a:t>.tmp</a:t>
+            </a:r>
+            <a:r>
+              <a:rPr sz="1700" b="0">
+                <a:solidFill>
+                  <a:srgbClr val="222222"/>
+                </a:solidFill>
+                <a:latin typeface="맑은 고딕"/>
+              </a:rPr>
+              <a:t> 임시</a:t>
             </a:r>
           </a:p>
           <a:p>
@@ -9336,7 +10044,44 @@
                 </a:solidFill>
                 <a:latin typeface="맑은 고딕"/>
               </a:rPr>
-              <a:t>•  **파일 번호는 이름에 없다** → `V$DATAFILE` 조회</a:t>
+              <a:t>•  </a:t>
+            </a:r>
+            <a:r>
+              <a:rPr sz="1700" b="1">
+                <a:solidFill>
+                  <a:srgbClr val="222222"/>
+                </a:solidFill>
+                <a:latin typeface="맑은 고딕"/>
+              </a:rPr>
+              <a:t>파일 번호는 이름에 없다</a:t>
+            </a:r>
+            <a:r>
+              <a:rPr sz="1700" b="0">
+                <a:solidFill>
+                  <a:srgbClr val="222222"/>
+                </a:solidFill>
+                <a:latin typeface="맑은 고딕"/>
+              </a:rPr>
+              <a:t> → </a:t>
+            </a:r>
+            <a:r>
+              <a:rPr sz="1700" b="0">
+                <a:solidFill>
+                  <a:srgbClr val="222222"/>
+                </a:solidFill>
+                <a:latin typeface="Consolas"/>
+                <a:cs typeface="Consolas"/>
+              </a:rPr>
+              <a:t>V$DATAFILE</a:t>
+            </a:r>
+            <a:r>
+              <a:rPr sz="1700" b="0">
+                <a:solidFill>
+                  <a:srgbClr val="222222"/>
+                </a:solidFill>
+                <a:latin typeface="맑은 고딕"/>
+              </a:rPr>
+              <a:t> 조회</a:t>
             </a:r>
           </a:p>
         </p:txBody>
@@ -9515,7 +10260,44 @@
                 </a:solidFill>
                 <a:latin typeface="맑은 고딕"/>
               </a:rPr>
-              <a:t>•  `V$LOGFILE` **14행** — 5장에서는 7행</a:t>
+              <a:t>•  </a:t>
+            </a:r>
+            <a:r>
+              <a:rPr sz="1700" b="0">
+                <a:solidFill>
+                  <a:srgbClr val="222222"/>
+                </a:solidFill>
+                <a:latin typeface="Consolas"/>
+                <a:cs typeface="Consolas"/>
+              </a:rPr>
+              <a:t>V$LOGFILE</a:t>
+            </a:r>
+            <a:r>
+              <a:rPr sz="1700" b="0">
+                <a:solidFill>
+                  <a:srgbClr val="222222"/>
+                </a:solidFill>
+                <a:latin typeface="맑은 고딕"/>
+              </a:rPr>
+              <a:t> </a:t>
+            </a:r>
+            <a:r>
+              <a:rPr sz="1700" b="1">
+                <a:solidFill>
+                  <a:srgbClr val="222222"/>
+                </a:solidFill>
+                <a:latin typeface="맑은 고딕"/>
+              </a:rPr>
+              <a:t>14행</a:t>
+            </a:r>
+            <a:r>
+              <a:rPr sz="1700" b="0">
+                <a:solidFill>
+                  <a:srgbClr val="222222"/>
+                </a:solidFill>
+                <a:latin typeface="맑은 고딕"/>
+              </a:rPr>
+              <a:t> — 5장에서는 7행</a:t>
             </a:r>
           </a:p>
           <a:p>
@@ -9547,7 +10329,35 @@
                 </a:solidFill>
                 <a:latin typeface="맑은 고딕"/>
               </a:rPr>
-              <a:t>•  한 벌은 `DB_CREATE_FILE_DEST`, 다른 한 벌은 **FRA**</a:t>
+              <a:t>•  한 벌은 </a:t>
+            </a:r>
+            <a:r>
+              <a:rPr sz="1700" b="0">
+                <a:solidFill>
+                  <a:srgbClr val="222222"/>
+                </a:solidFill>
+                <a:latin typeface="Consolas"/>
+                <a:cs typeface="Consolas"/>
+              </a:rPr>
+              <a:t>DB_CREATE_FILE_DEST</a:t>
+            </a:r>
+            <a:r>
+              <a:rPr sz="1700" b="0">
+                <a:solidFill>
+                  <a:srgbClr val="222222"/>
+                </a:solidFill>
+                <a:latin typeface="맑은 고딕"/>
+              </a:rPr>
+              <a:t>, 다른 한 벌은 </a:t>
+            </a:r>
+            <a:r>
+              <a:rPr sz="1700" b="1">
+                <a:solidFill>
+                  <a:srgbClr val="222222"/>
+                </a:solidFill>
+                <a:latin typeface="맑은 고딕"/>
+              </a:rPr>
+              <a:t>FRA</a:t>
             </a:r>
           </a:p>
           <a:p>
@@ -9563,7 +10373,26 @@
                 </a:solidFill>
                 <a:latin typeface="맑은 고딕"/>
               </a:rPr>
-              <a:t>•  조건 : `DB_CREATE_ONLINE_LOG_DEST_n` 미지정 + FRA 설정</a:t>
+              <a:t>•  조건 : </a:t>
+            </a:r>
+            <a:r>
+              <a:rPr sz="1700" b="0">
+                <a:solidFill>
+                  <a:srgbClr val="222222"/>
+                </a:solidFill>
+                <a:latin typeface="Consolas"/>
+                <a:cs typeface="Consolas"/>
+              </a:rPr>
+              <a:t>DB_CREATE_ONLINE_LOG_DEST_n</a:t>
+            </a:r>
+            <a:r>
+              <a:rPr sz="1700" b="0">
+                <a:solidFill>
+                  <a:srgbClr val="222222"/>
+                </a:solidFill>
+                <a:latin typeface="맑은 고딕"/>
+              </a:rPr>
+              <a:t> 미지정 + FRA 설정</a:t>
             </a:r>
           </a:p>
         </p:txBody>
@@ -9997,7 +10826,17 @@
                 </a:solidFill>
                 <a:latin typeface="맑은 고딕"/>
               </a:rPr>
-              <a:t>•  `/u03/app/oracle/oradata/Chicago/control01.ctl`</a:t>
+              <a:t>•  </a:t>
+            </a:r>
+            <a:r>
+              <a:rPr sz="1700" b="0">
+                <a:solidFill>
+                  <a:srgbClr val="222222"/>
+                </a:solidFill>
+                <a:latin typeface="Consolas"/>
+                <a:cs typeface="Consolas"/>
+              </a:rPr>
+              <a:t>/u03/app/oracle/oradata/Chicago/control01.ctl</a:t>
             </a:r>
           </a:p>
           <a:p>
@@ -10013,7 +10852,17 @@
                 </a:solidFill>
                 <a:latin typeface="맑은 고딕"/>
               </a:rPr>
-              <a:t>•  `/u03/app/oracle/fast_recovery_area/CHICAGO/control02.ctl`</a:t>
+              <a:t>•  </a:t>
+            </a:r>
+            <a:r>
+              <a:rPr sz="1700" b="0">
+                <a:solidFill>
+                  <a:srgbClr val="222222"/>
+                </a:solidFill>
+                <a:latin typeface="Consolas"/>
+                <a:cs typeface="Consolas"/>
+              </a:rPr>
+              <a:t>/u03/app/oracle/fast_recovery_area/CHICAGO/control02.ctl</a:t>
             </a:r>
           </a:p>
           <a:p>
@@ -10224,7 +11073,26 @@
                 </a:solidFill>
                 <a:latin typeface="맑은 고딕"/>
               </a:rPr>
-              <a:t>•  `CONTROL_FILES`는 Primary spfile에 값이 있다</a:t>
+              <a:t>•  </a:t>
+            </a:r>
+            <a:r>
+              <a:rPr sz="1700" b="0">
+                <a:solidFill>
+                  <a:srgbClr val="222222"/>
+                </a:solidFill>
+                <a:latin typeface="Consolas"/>
+                <a:cs typeface="Consolas"/>
+              </a:rPr>
+              <a:t>CONTROL_FILES</a:t>
+            </a:r>
+            <a:r>
+              <a:rPr sz="1700" b="0">
+                <a:solidFill>
+                  <a:srgbClr val="222222"/>
+                </a:solidFill>
+                <a:latin typeface="맑은 고딕"/>
+              </a:rPr>
+              <a:t>는 Primary spfile에 값이 있다</a:t>
             </a:r>
           </a:p>
           <a:p>
@@ -10256,7 +11124,45 @@
                 </a:solidFill>
                 <a:latin typeface="맑은 고딕"/>
               </a:rPr>
-              <a:t>•  스크립트에 `set control_files`도 `parameter_value_convert`도 없다</a:t>
+              <a:t>•  스크립트에 </a:t>
+            </a:r>
+            <a:r>
+              <a:rPr sz="1700" b="0">
+                <a:solidFill>
+                  <a:srgbClr val="222222"/>
+                </a:solidFill>
+                <a:latin typeface="Consolas"/>
+                <a:cs typeface="Consolas"/>
+              </a:rPr>
+              <a:t>set control_files</a:t>
+            </a:r>
+            <a:r>
+              <a:rPr sz="1700" b="0">
+                <a:solidFill>
+                  <a:srgbClr val="222222"/>
+                </a:solidFill>
+                <a:latin typeface="맑은 고딕"/>
+              </a:rPr>
+              <a:t>도 </a:t>
+            </a:r>
+            <a:r>
+              <a:rPr sz="1700" b="0">
+                <a:solidFill>
+                  <a:srgbClr val="222222"/>
+                </a:solidFill>
+                <a:latin typeface="Consolas"/>
+                <a:cs typeface="Consolas"/>
+              </a:rPr>
+              <a:t>parameter_value_convert</a:t>
+            </a:r>
+            <a:r>
+              <a:rPr sz="1700" b="0">
+                <a:solidFill>
+                  <a:srgbClr val="222222"/>
+                </a:solidFill>
+                <a:latin typeface="맑은 고딕"/>
+              </a:rPr>
+              <a:t>도 없다</a:t>
             </a:r>
           </a:p>
           <a:p>
@@ -10272,7 +11178,26 @@
                 </a:solidFill>
                 <a:latin typeface="맑은 고딕"/>
               </a:rPr>
-              <a:t>•  **`CONTROL_FILES`에 값이 있으면 OMF는 개입하지 않는다**</a:t>
+              <a:t>•  </a:t>
+            </a:r>
+            <a:r>
+              <a:rPr sz="1700" b="1">
+                <a:solidFill>
+                  <a:srgbClr val="222222"/>
+                </a:solidFill>
+                <a:latin typeface="Consolas"/>
+                <a:cs typeface="Consolas"/>
+              </a:rPr>
+              <a:t>CONTROL_FILES</a:t>
+            </a:r>
+            <a:r>
+              <a:rPr sz="1700" b="1">
+                <a:solidFill>
+                  <a:srgbClr val="222222"/>
+                </a:solidFill>
+                <a:latin typeface="맑은 고딕"/>
+              </a:rPr>
+              <a:t>에 값이 있으면 OMF는 개입하지 않는다</a:t>
             </a:r>
           </a:p>
         </p:txBody>
@@ -10451,7 +11376,25 @@
                 </a:solidFill>
                 <a:latin typeface="맑은 고딕"/>
               </a:rPr>
-              <a:t>•  **오해** — 운영자가 Primary 잔재로 오인해 지울 수 있다</a:t>
+              <a:t>•  </a:t>
+            </a:r>
+            <a:r>
+              <a:rPr sz="1700" b="1">
+                <a:solidFill>
+                  <a:srgbClr val="222222"/>
+                </a:solidFill>
+                <a:latin typeface="맑은 고딕"/>
+              </a:rPr>
+              <a:t>오해</a:t>
+            </a:r>
+            <a:r>
+              <a:rPr sz="1700" b="0">
+                <a:solidFill>
+                  <a:srgbClr val="222222"/>
+                </a:solidFill>
+                <a:latin typeface="맑은 고딕"/>
+              </a:rPr>
+              <a:t> — 운영자가 Primary 잔재로 오인해 지울 수 있다</a:t>
             </a:r>
           </a:p>
           <a:p>
@@ -10467,7 +11410,25 @@
                 </a:solidFill>
                 <a:latin typeface="맑은 고딕"/>
               </a:rPr>
-              <a:t>•  **정리 누락** — 폐기 시 BOSTON만 지우면 컨트롤 파일이 남는다</a:t>
+              <a:t>•  </a:t>
+            </a:r>
+            <a:r>
+              <a:rPr sz="1700" b="1">
+                <a:solidFill>
+                  <a:srgbClr val="222222"/>
+                </a:solidFill>
+                <a:latin typeface="맑은 고딕"/>
+              </a:rPr>
+              <a:t>정리 누락</a:t>
+            </a:r>
+            <a:r>
+              <a:rPr sz="1700" b="0">
+                <a:solidFill>
+                  <a:srgbClr val="222222"/>
+                </a:solidFill>
+                <a:latin typeface="맑은 고딕"/>
+              </a:rPr>
+              <a:t> — 폐기 시 BOSTON만 지우면 컨트롤 파일이 남는다</a:t>
             </a:r>
           </a:p>
           <a:p>
@@ -10483,7 +11444,25 @@
                 </a:solidFill>
                 <a:latin typeface="맑은 고딕"/>
               </a:rPr>
-              <a:t>•  **일관성 붕괴** — OMF를 쓰기로 했으면 예외가 없는 편이 낫다</a:t>
+              <a:t>•  </a:t>
+            </a:r>
+            <a:r>
+              <a:rPr sz="1700" b="1">
+                <a:solidFill>
+                  <a:srgbClr val="222222"/>
+                </a:solidFill>
+                <a:latin typeface="맑은 고딕"/>
+              </a:rPr>
+              <a:t>일관성 붕괴</a:t>
+            </a:r>
+            <a:r>
+              <a:rPr sz="1700" b="0">
+                <a:solidFill>
+                  <a:srgbClr val="222222"/>
+                </a:solidFill>
+                <a:latin typeface="맑은 고딕"/>
+              </a:rPr>
+              <a:t> — OMF를 쓰기로 했으면 예외가 없는 편이 낫다</a:t>
             </a:r>
           </a:p>
           <a:p>
@@ -10930,7 +11909,26 @@
                 </a:solidFill>
                 <a:latin typeface="맑은 고딕"/>
               </a:rPr>
-              <a:t>•  ① `mkdir -p .../BOSTON/controlfile` (양쪽)</a:t>
+              <a:t>•  ① </a:t>
+            </a:r>
+            <a:r>
+              <a:rPr sz="1700" b="0">
+                <a:solidFill>
+                  <a:srgbClr val="222222"/>
+                </a:solidFill>
+                <a:latin typeface="Consolas"/>
+                <a:cs typeface="Consolas"/>
+              </a:rPr>
+              <a:t>mkdir -p .../BOSTON/controlfile</a:t>
+            </a:r>
+            <a:r>
+              <a:rPr sz="1700" b="0">
+                <a:solidFill>
+                  <a:srgbClr val="222222"/>
+                </a:solidFill>
+                <a:latin typeface="맑은 고딕"/>
+              </a:rPr>
+              <a:t> (양쪽)</a:t>
             </a:r>
           </a:p>
           <a:p>
@@ -10946,7 +11944,17 @@
                 </a:solidFill>
                 <a:latin typeface="맑은 고딕"/>
               </a:rPr>
-              <a:t>•  ② `ALTER SYSTEM SET control_files=... SCOPE=SPFILE`</a:t>
+              <a:t>•  ② </a:t>
+            </a:r>
+            <a:r>
+              <a:rPr sz="1700" b="0">
+                <a:solidFill>
+                  <a:srgbClr val="222222"/>
+                </a:solidFill>
+                <a:latin typeface="Consolas"/>
+                <a:cs typeface="Consolas"/>
+              </a:rPr>
+              <a:t>ALTER SYSTEM SET control_files=... SCOPE=SPFILE</a:t>
             </a:r>
           </a:p>
           <a:p>
@@ -10962,7 +11970,17 @@
                 </a:solidFill>
                 <a:latin typeface="맑은 고딕"/>
               </a:rPr>
-              <a:t>•  ③ 적용 중지 → `SHUTDOWN IMMEDIATE`</a:t>
+              <a:t>•  ③ 적용 중지 → </a:t>
+            </a:r>
+            <a:r>
+              <a:rPr sz="1700" b="0">
+                <a:solidFill>
+                  <a:srgbClr val="222222"/>
+                </a:solidFill>
+                <a:latin typeface="Consolas"/>
+                <a:cs typeface="Consolas"/>
+              </a:rPr>
+              <a:t>SHUTDOWN IMMEDIATE</a:t>
             </a:r>
           </a:p>
           <a:p>
@@ -10978,7 +11996,45 @@
                 </a:solidFill>
                 <a:latin typeface="맑은 고딕"/>
               </a:rPr>
-              <a:t>•  ④ `mv`로 파일 이동 → `STARTUP MOUNT` → ADG 복귀</a:t>
+              <a:t>•  ④ </a:t>
+            </a:r>
+            <a:r>
+              <a:rPr sz="1700" b="0">
+                <a:solidFill>
+                  <a:srgbClr val="222222"/>
+                </a:solidFill>
+                <a:latin typeface="Consolas"/>
+                <a:cs typeface="Consolas"/>
+              </a:rPr>
+              <a:t>mv</a:t>
+            </a:r>
+            <a:r>
+              <a:rPr sz="1700" b="0">
+                <a:solidFill>
+                  <a:srgbClr val="222222"/>
+                </a:solidFill>
+                <a:latin typeface="맑은 고딕"/>
+              </a:rPr>
+              <a:t>로 파일 이동 → </a:t>
+            </a:r>
+            <a:r>
+              <a:rPr sz="1700" b="0">
+                <a:solidFill>
+                  <a:srgbClr val="222222"/>
+                </a:solidFill>
+                <a:latin typeface="Consolas"/>
+                <a:cs typeface="Consolas"/>
+              </a:rPr>
+              <a:t>STARTUP MOUNT</a:t>
+            </a:r>
+            <a:r>
+              <a:rPr sz="1700" b="0">
+                <a:solidFill>
+                  <a:srgbClr val="222222"/>
+                </a:solidFill>
+                <a:latin typeface="맑은 고딕"/>
+              </a:rPr>
+              <a:t> → ADG 복귀</a:t>
             </a:r>
           </a:p>
           <a:p>
@@ -10994,7 +12050,17 @@
                 </a:solidFill>
                 <a:latin typeface="맑은 고딕"/>
               </a:rPr>
-              <a:t>•  순서를 어기면 `ORA-00205`</a:t>
+              <a:t>•  순서를 어기면 </a:t>
+            </a:r>
+            <a:r>
+              <a:rPr sz="1700" b="0">
+                <a:solidFill>
+                  <a:srgbClr val="222222"/>
+                </a:solidFill>
+                <a:latin typeface="Consolas"/>
+                <a:cs typeface="Consolas"/>
+              </a:rPr>
+              <a:t>ORA-00205</a:t>
             </a:r>
           </a:p>
         </p:txBody>
@@ -11173,7 +12239,17 @@
                 </a:solidFill>
                 <a:latin typeface="맑은 고딕"/>
               </a:rPr>
-              <a:t>•  `set control_files = '.../BOSTON/controlfile/control01.ctl', '...'`</a:t>
+              <a:t>•  </a:t>
+            </a:r>
+            <a:r>
+              <a:rPr sz="1700" b="0">
+                <a:solidFill>
+                  <a:srgbClr val="222222"/>
+                </a:solidFill>
+                <a:latin typeface="Consolas"/>
+                <a:cs typeface="Consolas"/>
+              </a:rPr>
+              <a:t>set control_files = '.../BOSTON/controlfile/control01.ctl', '...'</a:t>
             </a:r>
           </a:p>
           <a:p>
@@ -11655,7 +12731,35 @@
                 </a:solidFill>
                 <a:latin typeface="맑은 고딕"/>
               </a:rPr>
-              <a:t>•  `create spfile from pfile='.../initboston.ora'` → **ORA-32002**</a:t>
+              <a:t>•  </a:t>
+            </a:r>
+            <a:r>
+              <a:rPr sz="1700" b="0">
+                <a:solidFill>
+                  <a:srgbClr val="222222"/>
+                </a:solidFill>
+                <a:latin typeface="Consolas"/>
+                <a:cs typeface="Consolas"/>
+              </a:rPr>
+              <a:t>create spfile from pfile='.../initboston.ora'</a:t>
+            </a:r>
+            <a:r>
+              <a:rPr sz="1700" b="0">
+                <a:solidFill>
+                  <a:srgbClr val="222222"/>
+                </a:solidFill>
+                <a:latin typeface="맑은 고딕"/>
+              </a:rPr>
+              <a:t> → </a:t>
+            </a:r>
+            <a:r>
+              <a:rPr sz="1700" b="1">
+                <a:solidFill>
+                  <a:srgbClr val="222222"/>
+                </a:solidFill>
+                <a:latin typeface="맑은 고딕"/>
+              </a:rPr>
+              <a:t>ORA-32002</a:t>
             </a:r>
           </a:p>
           <a:p>
@@ -11687,7 +12791,102 @@
                 </a:solidFill>
                 <a:latin typeface="맑은 고딕"/>
               </a:rPr>
-              <a:t>•  사라졌을 값 : `db_unique_name` · `fal_server` · `log_archive_config` · `standby_file_management` · `control_files` 등</a:t>
+              <a:t>•  사라졌을 값 : </a:t>
+            </a:r>
+            <a:r>
+              <a:rPr sz="1700" b="0">
+                <a:solidFill>
+                  <a:srgbClr val="222222"/>
+                </a:solidFill>
+                <a:latin typeface="Consolas"/>
+                <a:cs typeface="Consolas"/>
+              </a:rPr>
+              <a:t>db_unique_name</a:t>
+            </a:r>
+            <a:r>
+              <a:rPr sz="1700" b="0">
+                <a:solidFill>
+                  <a:srgbClr val="222222"/>
+                </a:solidFill>
+                <a:latin typeface="맑은 고딕"/>
+              </a:rPr>
+              <a:t> · </a:t>
+            </a:r>
+            <a:r>
+              <a:rPr sz="1700" b="0">
+                <a:solidFill>
+                  <a:srgbClr val="222222"/>
+                </a:solidFill>
+                <a:latin typeface="Consolas"/>
+                <a:cs typeface="Consolas"/>
+              </a:rPr>
+              <a:t>fal_server</a:t>
+            </a:r>
+            <a:r>
+              <a:rPr sz="1700" b="0">
+                <a:solidFill>
+                  <a:srgbClr val="222222"/>
+                </a:solidFill>
+                <a:latin typeface="맑은 고딕"/>
+              </a:rPr>
+              <a:t> · </a:t>
+            </a:r>
+            <a:r>
+              <a:rPr sz="1700" b="0">
+                <a:solidFill>
+                  <a:srgbClr val="222222"/>
+                </a:solidFill>
+                <a:latin typeface="Consolas"/>
+                <a:cs typeface="Consolas"/>
+              </a:rPr>
+              <a:t>log_archive_config</a:t>
+            </a:r>
+            <a:r>
+              <a:rPr sz="1700" b="0">
+                <a:solidFill>
+                  <a:srgbClr val="222222"/>
+                </a:solidFill>
+                <a:latin typeface="맑은 고딕"/>
+              </a:rPr>
+              <a:t> · </a:t>
+            </a:r>
+            <a:r>
+              <a:rPr sz="1700" b="0">
+                <a:solidFill>
+                  <a:srgbClr val="222222"/>
+                </a:solidFill>
+                <a:latin typeface="Consolas"/>
+                <a:cs typeface="Consolas"/>
+              </a:rPr>
+              <a:t>standby_file_management</a:t>
+            </a:r>
+            <a:r>
+              <a:rPr sz="1700" b="0">
+                <a:solidFill>
+                  <a:srgbClr val="222222"/>
+                </a:solidFill>
+                <a:latin typeface="맑은 고딕"/>
+              </a:rPr>
+              <a:t> · </a:t>
+            </a:r>
+            <a:r>
+              <a:rPr sz="1700" b="0">
+                <a:solidFill>
+                  <a:srgbClr val="222222"/>
+                </a:solidFill>
+                <a:latin typeface="Consolas"/>
+                <a:cs typeface="Consolas"/>
+              </a:rPr>
+              <a:t>control_files</a:t>
+            </a:r>
+            <a:r>
+              <a:rPr sz="1700" b="0">
+                <a:solidFill>
+                  <a:srgbClr val="222222"/>
+                </a:solidFill>
+                <a:latin typeface="맑은 고딕"/>
+              </a:rPr>
+              <a:t> 등</a:t>
             </a:r>
           </a:p>
           <a:p>
@@ -11703,7 +12902,45 @@
                 </a:solidFill>
                 <a:latin typeface="맑은 고딕"/>
               </a:rPr>
-              <a:t>•  이어지는 `shutdown` / `startup`까지 갔다면 구성이 해체된다</a:t>
+              <a:t>•  이어지는 </a:t>
+            </a:r>
+            <a:r>
+              <a:rPr sz="1700" b="0">
+                <a:solidFill>
+                  <a:srgbClr val="222222"/>
+                </a:solidFill>
+                <a:latin typeface="Consolas"/>
+                <a:cs typeface="Consolas"/>
+              </a:rPr>
+              <a:t>shutdown</a:t>
+            </a:r>
+            <a:r>
+              <a:rPr sz="1700" b="0">
+                <a:solidFill>
+                  <a:srgbClr val="222222"/>
+                </a:solidFill>
+                <a:latin typeface="맑은 고딕"/>
+              </a:rPr>
+              <a:t> / </a:t>
+            </a:r>
+            <a:r>
+              <a:rPr sz="1700" b="0">
+                <a:solidFill>
+                  <a:srgbClr val="222222"/>
+                </a:solidFill>
+                <a:latin typeface="Consolas"/>
+                <a:cs typeface="Consolas"/>
+              </a:rPr>
+              <a:t>startup</a:t>
+            </a:r>
+            <a:r>
+              <a:rPr sz="1700" b="0">
+                <a:solidFill>
+                  <a:srgbClr val="222222"/>
+                </a:solidFill>
+                <a:latin typeface="맑은 고딕"/>
+              </a:rPr>
+              <a:t>까지 갔다면 구성이 해체된다</a:t>
             </a:r>
           </a:p>
         </p:txBody>
@@ -11898,7 +13135,16 @@
                 </a:solidFill>
                 <a:latin typeface="맑은 고딕"/>
               </a:rPr>
-              <a:t>•  같은 것 : **데이터 파일 개수 11개 · 번호 · 크기**</a:t>
+              <a:t>•  같은 것 : </a:t>
+            </a:r>
+            <a:r>
+              <a:rPr sz="1700" b="1">
+                <a:solidFill>
+                  <a:srgbClr val="222222"/>
+                </a:solidFill>
+                <a:latin typeface="맑은 고딕"/>
+              </a:rPr>
+              <a:t>데이터 파일 개수 11개 · 번호 · 크기</a:t>
             </a:r>
           </a:p>
           <a:p>
@@ -12141,7 +13387,25 @@
                 </a:solidFill>
                 <a:latin typeface="맑은 고딕"/>
               </a:rPr>
-              <a:t>•  둘 다 주면 **OMF가 이긴다** (convert는 무시된다)</a:t>
+              <a:t>•  둘 다 주면 </a:t>
+            </a:r>
+            <a:r>
+              <a:rPr sz="1700" b="1">
+                <a:solidFill>
+                  <a:srgbClr val="222222"/>
+                </a:solidFill>
+                <a:latin typeface="맑은 고딕"/>
+              </a:rPr>
+              <a:t>OMF가 이긴다</a:t>
+            </a:r>
+            <a:r>
+              <a:rPr sz="1700" b="0">
+                <a:solidFill>
+                  <a:srgbClr val="222222"/>
+                </a:solidFill>
+                <a:latin typeface="맑은 고딕"/>
+              </a:rPr>
+              <a:t> (convert는 무시된다)</a:t>
             </a:r>
           </a:p>
           <a:p>
@@ -12336,7 +13600,26 @@
                 </a:solidFill>
                 <a:latin typeface="맑은 고딕"/>
               </a:rPr>
-              <a:t>•  boston : `READ ONLY WITH APPLY`, DBID 1852041610</a:t>
+              <a:t>•  boston : </a:t>
+            </a:r>
+            <a:r>
+              <a:rPr sz="1700" b="0">
+                <a:solidFill>
+                  <a:srgbClr val="222222"/>
+                </a:solidFill>
+                <a:latin typeface="Consolas"/>
+                <a:cs typeface="Consolas"/>
+              </a:rPr>
+              <a:t>READ ONLY WITH APPLY</a:t>
+            </a:r>
+            <a:r>
+              <a:rPr sz="1700" b="0">
+                <a:solidFill>
+                  <a:srgbClr val="222222"/>
+                </a:solidFill>
+                <a:latin typeface="맑은 고딕"/>
+              </a:rPr>
+              <a:t>, DBID 1852041610</a:t>
             </a:r>
           </a:p>
           <a:p>
@@ -12352,7 +13635,17 @@
                 </a:solidFill>
                 <a:latin typeface="맑은 고딕"/>
               </a:rPr>
-              <a:t>•  데이터 파일 `/u03/app/oracle/oradata/BOSTON/**/o1_mf_*.dbf`</a:t>
+              <a:t>•  데이터 파일 </a:t>
+            </a:r>
+            <a:r>
+              <a:rPr sz="1700" b="0">
+                <a:solidFill>
+                  <a:srgbClr val="222222"/>
+                </a:solidFill>
+                <a:latin typeface="Consolas"/>
+                <a:cs typeface="Consolas"/>
+              </a:rPr>
+              <a:t>/u03/app/oracle/oradata/BOSTON/**/o1_mf_*.dbf</a:t>
             </a:r>
           </a:p>
           <a:p>
@@ -12368,7 +13661,26 @@
                 </a:solidFill>
                 <a:latin typeface="맑은 고딕"/>
               </a:rPr>
-              <a:t>•  컨트롤 파일 `BOSTON/controlfile/` (교정 완료)</a:t>
+              <a:t>•  컨트롤 파일 </a:t>
+            </a:r>
+            <a:r>
+              <a:rPr sz="1700" b="0">
+                <a:solidFill>
+                  <a:srgbClr val="222222"/>
+                </a:solidFill>
+                <a:latin typeface="Consolas"/>
+                <a:cs typeface="Consolas"/>
+              </a:rPr>
+              <a:t>BOSTON/controlfile/</a:t>
+            </a:r>
+            <a:r>
+              <a:rPr sz="1700" b="0">
+                <a:solidFill>
+                  <a:srgbClr val="222222"/>
+                </a:solidFill>
+                <a:latin typeface="맑은 고딕"/>
+              </a:rPr>
+              <a:t> (교정 완료)</a:t>
             </a:r>
           </a:p>
           <a:p>
@@ -12524,7 +13836,26 @@
                 </a:solidFill>
                 <a:latin typeface="맑은 고딕"/>
               </a:rPr>
-              <a:t>•  Q1. `NOFILENAMECHECK`가 OMF 방식에서 필요 없는 이유를 파일 이름 규칙과 연결해 설명하라.</a:t>
+              <a:t>•  Q1. </a:t>
+            </a:r>
+            <a:r>
+              <a:rPr sz="1600" b="0">
+                <a:solidFill>
+                  <a:srgbClr val="222222"/>
+                </a:solidFill>
+                <a:latin typeface="Consolas"/>
+                <a:cs typeface="Consolas"/>
+              </a:rPr>
+              <a:t>NOFILENAMECHECK</a:t>
+            </a:r>
+            <a:r>
+              <a:rPr sz="1600" b="0">
+                <a:solidFill>
+                  <a:srgbClr val="222222"/>
+                </a:solidFill>
+                <a:latin typeface="맑은 고딕"/>
+              </a:rPr>
+              <a:t>가 OMF 방식에서 필요 없는 이유를 파일 이름 규칙과 연결해 설명하라.</a:t>
             </a:r>
           </a:p>
           <a:p>
@@ -12540,7 +13871,26 @@
                 </a:solidFill>
                 <a:latin typeface="맑은 고딕"/>
               </a:rPr>
-              <a:t>•  Q2. `db_create_file_dest`에 없는 경로를 주었을 때와 아예 주지 않았을 때의 오류가 어떻게 다른가?</a:t>
+              <a:t>•  Q2. </a:t>
+            </a:r>
+            <a:r>
+              <a:rPr sz="1600" b="0">
+                <a:solidFill>
+                  <a:srgbClr val="222222"/>
+                </a:solidFill>
+                <a:latin typeface="Consolas"/>
+                <a:cs typeface="Consolas"/>
+              </a:rPr>
+              <a:t>db_create_file_dest</a:t>
+            </a:r>
+            <a:r>
+              <a:rPr sz="1600" b="0">
+                <a:solidFill>
+                  <a:srgbClr val="222222"/>
+                </a:solidFill>
+                <a:latin typeface="맑은 고딕"/>
+              </a:rPr>
+              <a:t>에 없는 경로를 주었을 때와 아예 주지 않았을 때의 오류가 어떻게 다른가?</a:t>
             </a:r>
           </a:p>
           <a:p>
@@ -12556,7 +13906,64 @@
                 </a:solidFill>
                 <a:latin typeface="맑은 고딕"/>
               </a:rPr>
-              <a:t>•  Q3. `BOSTON` 디렉터리 이름이 `DB_NAME`이 아니라 `DB_UNIQUE_NAME`에서 온다는 사실이 왜 중요한가?</a:t>
+              <a:t>•  Q3. </a:t>
+            </a:r>
+            <a:r>
+              <a:rPr sz="1600" b="0">
+                <a:solidFill>
+                  <a:srgbClr val="222222"/>
+                </a:solidFill>
+                <a:latin typeface="Consolas"/>
+                <a:cs typeface="Consolas"/>
+              </a:rPr>
+              <a:t>BOSTON</a:t>
+            </a:r>
+            <a:r>
+              <a:rPr sz="1600" b="0">
+                <a:solidFill>
+                  <a:srgbClr val="222222"/>
+                </a:solidFill>
+                <a:latin typeface="맑은 고딕"/>
+              </a:rPr>
+              <a:t> 디렉터리 이름이 </a:t>
+            </a:r>
+            <a:r>
+              <a:rPr sz="1600" b="0">
+                <a:solidFill>
+                  <a:srgbClr val="222222"/>
+                </a:solidFill>
+                <a:latin typeface="Consolas"/>
+                <a:cs typeface="Consolas"/>
+              </a:rPr>
+              <a:t>DB_NAME</a:t>
+            </a:r>
+            <a:r>
+              <a:rPr sz="1600" b="0">
+                <a:solidFill>
+                  <a:srgbClr val="222222"/>
+                </a:solidFill>
+                <a:latin typeface="맑은 고딕"/>
+              </a:rPr>
+              <a:t>이 아니라 </a:t>
+            </a:r>
+            <a:r>
+              <a:rPr sz="1600" b="0">
+                <a:solidFill>
+                  <a:srgbClr val="222222"/>
+                </a:solidFill>
+                <a:latin typeface="Consolas"/>
+                <a:cs typeface="Consolas"/>
+              </a:rPr>
+              <a:t>DB_UNIQUE_NAME</a:t>
+            </a:r>
+            <a:r>
+              <a:rPr sz="1600" b="0">
+                <a:solidFill>
+                  <a:srgbClr val="222222"/>
+                </a:solidFill>
+                <a:latin typeface="맑은 고딕"/>
+              </a:rPr>
+              <a:t>에서 온다는 사실이 왜 중요한가?</a:t>
             </a:r>
           </a:p>
           <a:p>
@@ -12744,7 +14151,26 @@
                 </a:solidFill>
                 <a:latin typeface="맑은 고딕"/>
               </a:rPr>
-              <a:t>•  OMF는 `DB_CREATE_FILE_DEST` 하나로 파일 배치를 오라클에 맡긴다. 켜고 끄는 스위치가 아니라 파일 단위 규칙이다.</a:t>
+              <a:t>•  OMF는 </a:t>
+            </a:r>
+            <a:r>
+              <a:rPr sz="1600" b="0">
+                <a:solidFill>
+                  <a:srgbClr val="222222"/>
+                </a:solidFill>
+                <a:latin typeface="Consolas"/>
+                <a:cs typeface="Consolas"/>
+              </a:rPr>
+              <a:t>DB_CREATE_FILE_DEST</a:t>
+            </a:r>
+            <a:r>
+              <a:rPr sz="1600" b="0">
+                <a:solidFill>
+                  <a:srgbClr val="222222"/>
+                </a:solidFill>
+                <a:latin typeface="맑은 고딕"/>
+              </a:rPr>
+              <a:t> 하나로 파일 배치를 오라클에 맡긴다. 켜고 끄는 스위치가 아니라 파일 단위 규칙이다.</a:t>
             </a:r>
           </a:p>
           <a:p>
@@ -12776,7 +14202,26 @@
                 </a:solidFill>
                 <a:latin typeface="맑은 고딕"/>
               </a:rPr>
-              <a:t>•  스크립트에서 다섯 절이 사라지고 세 절이 생긴다. `set control_files`만 대체 수단이 없다.</a:t>
+              <a:t>•  스크립트에서 다섯 절이 사라지고 세 절이 생긴다. </a:t>
+            </a:r>
+            <a:r>
+              <a:rPr sz="1600" b="0">
+                <a:solidFill>
+                  <a:srgbClr val="222222"/>
+                </a:solidFill>
+                <a:latin typeface="Consolas"/>
+                <a:cs typeface="Consolas"/>
+              </a:rPr>
+              <a:t>set control_files</a:t>
+            </a:r>
+            <a:r>
+              <a:rPr sz="1600" b="0">
+                <a:solidFill>
+                  <a:srgbClr val="222222"/>
+                </a:solidFill>
+                <a:latin typeface="맑은 고딕"/>
+              </a:rPr>
+              <a:t>만 대체 수단이 없다.</a:t>
             </a:r>
           </a:p>
           <a:p>
@@ -12792,7 +14237,26 @@
                 </a:solidFill>
                 <a:latin typeface="맑은 고딕"/>
               </a:rPr>
-              <a:t>•  `NOFILENAMECHECK`가 불필요한 이유는 OMF 이름의 유일 문자열 때문에 충돌이 불가능해서다.</a:t>
+              <a:t>•  </a:t>
+            </a:r>
+            <a:r>
+              <a:rPr sz="1600" b="0">
+                <a:solidFill>
+                  <a:srgbClr val="222222"/>
+                </a:solidFill>
+                <a:latin typeface="Consolas"/>
+                <a:cs typeface="Consolas"/>
+              </a:rPr>
+              <a:t>NOFILENAMECHECK</a:t>
+            </a:r>
+            <a:r>
+              <a:rPr sz="1600" b="0">
+                <a:solidFill>
+                  <a:srgbClr val="222222"/>
+                </a:solidFill>
+                <a:latin typeface="맑은 고딕"/>
+              </a:rPr>
+              <a:t>가 불필요한 이유는 OMF 이름의 유일 문자열 때문에 충돌이 불가능해서다.</a:t>
             </a:r>
           </a:p>
           <a:p>
@@ -12808,7 +14272,26 @@
                 </a:solidFill>
                 <a:latin typeface="맑은 고딕"/>
               </a:rPr>
-              <a:t>•  없는 경로 → 인스턴스가 뜨지 않는다. ORA-01261 + ORA-01262 + `Linux-x86_64 Error: 2` + ORA-01034.</a:t>
+              <a:t>•  없는 경로 → 인스턴스가 뜨지 않는다. ORA-01261 + ORA-01262 + </a:t>
+            </a:r>
+            <a:r>
+              <a:rPr sz="1600" b="0">
+                <a:solidFill>
+                  <a:srgbClr val="222222"/>
+                </a:solidFill>
+                <a:latin typeface="Consolas"/>
+                <a:cs typeface="Consolas"/>
+              </a:rPr>
+              <a:t>Linux-x86_64 Error: 2</a:t>
+            </a:r>
+            <a:r>
+              <a:rPr sz="1600" b="0">
+                <a:solidFill>
+                  <a:srgbClr val="222222"/>
+                </a:solidFill>
+                <a:latin typeface="맑은 고딕"/>
+              </a:rPr>
+              <a:t> + ORA-01034.</a:t>
             </a:r>
           </a:p>
           <a:p>
@@ -12824,7 +14307,26 @@
                 </a:solidFill>
                 <a:latin typeface="맑은 고딕"/>
               </a:rPr>
-              <a:t>•  `Linux-x86_64 Error: 2`는 ENOENT(경로 없음), 13은 EACCES(권한). 이 숫자가 진단의 분기점이다.</a:t>
+              <a:t>•  </a:t>
+            </a:r>
+            <a:r>
+              <a:rPr sz="1600" b="0">
+                <a:solidFill>
+                  <a:srgbClr val="222222"/>
+                </a:solidFill>
+                <a:latin typeface="Consolas"/>
+                <a:cs typeface="Consolas"/>
+              </a:rPr>
+              <a:t>Linux-x86_64 Error: 2</a:t>
+            </a:r>
+            <a:r>
+              <a:rPr sz="1600" b="0">
+                <a:solidFill>
+                  <a:srgbClr val="222222"/>
+                </a:solidFill>
+                <a:latin typeface="맑은 고딕"/>
+              </a:rPr>
+              <a:t>는 ENOENT(경로 없음), 13은 EACCES(권한). 이 숫자가 진단의 분기점이다.</a:t>
             </a:r>
           </a:p>
           <a:p>
@@ -12840,7 +14342,26 @@
                 </a:solidFill>
                 <a:latin typeface="맑은 고딕"/>
               </a:rPr>
-              <a:t>•  인스턴스가 없으면 RMAN은 `failure of allocate command` + RMAN-06403 + ORA-27101로 끝난다.</a:t>
+              <a:t>•  인스턴스가 없으면 RMAN은 </a:t>
+            </a:r>
+            <a:r>
+              <a:rPr sz="1600" b="0">
+                <a:solidFill>
+                  <a:srgbClr val="222222"/>
+                </a:solidFill>
+                <a:latin typeface="Consolas"/>
+                <a:cs typeface="Consolas"/>
+              </a:rPr>
+              <a:t>failure of allocate command</a:t>
+            </a:r>
+            <a:r>
+              <a:rPr sz="1600" b="0">
+                <a:solidFill>
+                  <a:srgbClr val="222222"/>
+                </a:solidFill>
+                <a:latin typeface="맑은 고딕"/>
+              </a:rPr>
+              <a:t> + RMAN-06403 + ORA-27101로 끝난다.</a:t>
             </a:r>
           </a:p>
           <a:p>
@@ -12872,7 +14393,26 @@
                 </a:solidFill>
                 <a:latin typeface="맑은 고딕"/>
               </a:rPr>
-              <a:t>•  성공 실행은 390줄, `rc=0`, 오류 0줄, 49번 Starting / 383번 Finished.</a:t>
+              <a:t>•  성공 실행은 390줄, </a:t>
+            </a:r>
+            <a:r>
+              <a:rPr sz="1600" b="0">
+                <a:solidFill>
+                  <a:srgbClr val="222222"/>
+                </a:solidFill>
+                <a:latin typeface="Consolas"/>
+                <a:cs typeface="Consolas"/>
+              </a:rPr>
+              <a:t>rc=0</a:t>
+            </a:r>
+            <a:r>
+              <a:rPr sz="1600" b="0">
+                <a:solidFill>
+                  <a:srgbClr val="222222"/>
+                </a:solidFill>
+                <a:latin typeface="맑은 고딕"/>
+              </a:rPr>
+              <a:t>, 오류 0줄, 49번 Starting / 383번 Finished.</a:t>
             </a:r>
           </a:p>
           <a:p>
@@ -12904,7 +14444,26 @@
                 </a:solidFill>
                 <a:latin typeface="맑은 고딕"/>
               </a:rPr>
-              <a:t>•  OMF는 mkdir 없이 여덟 개 디렉터리를 만든다. 최상위는 `DB_UNIQUE_NAME`의 대문자.</a:t>
+              <a:t>•  OMF는 mkdir 없이 여덟 개 디렉터리를 만든다. 최상위는 </a:t>
+            </a:r>
+            <a:r>
+              <a:rPr sz="1600" b="0">
+                <a:solidFill>
+                  <a:srgbClr val="222222"/>
+                </a:solidFill>
+                <a:latin typeface="Consolas"/>
+                <a:cs typeface="Consolas"/>
+              </a:rPr>
+              <a:t>DB_UNIQUE_NAME</a:t>
+            </a:r>
+            <a:r>
+              <a:rPr sz="1600" b="0">
+                <a:solidFill>
+                  <a:srgbClr val="222222"/>
+                </a:solidFill>
+                <a:latin typeface="맑은 고딕"/>
+              </a:rPr>
+              <a:t>의 대문자.</a:t>
             </a:r>
           </a:p>
           <a:p>
@@ -12936,7 +14495,26 @@
                 </a:solidFill>
                 <a:latin typeface="맑은 고딕"/>
               </a:rPr>
-              <a:t>•  이름 규칙은 `o1_mf_&lt;테이블스페이스&gt;_&lt;유일문자열&gt;_.&lt;확장자&gt;`. 파일 번호는 이름에 없다.</a:t>
+              <a:t>•  이름 규칙은 </a:t>
+            </a:r>
+            <a:r>
+              <a:rPr sz="1600" b="0">
+                <a:solidFill>
+                  <a:srgbClr val="222222"/>
+                </a:solidFill>
+                <a:latin typeface="Consolas"/>
+                <a:cs typeface="Consolas"/>
+              </a:rPr>
+              <a:t>o1_mf_&lt;테이블스페이스&gt;_&lt;유일문자열&gt;_.&lt;확장자&gt;</a:t>
+            </a:r>
+            <a:r>
+              <a:rPr sz="1600" b="0">
+                <a:solidFill>
+                  <a:srgbClr val="222222"/>
+                </a:solidFill>
+                <a:latin typeface="맑은 고딕"/>
+              </a:rPr>
+              <a:t>. 파일 번호는 이름에 없다.</a:t>
             </a:r>
           </a:p>
           <a:p>
@@ -12968,7 +14546,64 @@
                 </a:solidFill>
                 <a:latin typeface="맑은 고딕"/>
               </a:rPr>
-              <a:t>•  컨트롤 파일은 예외다. `CONTROL_FILES`가 상속되어 Standby에 `Chicago`·`CHICAGO`가 생긴다.</a:t>
+              <a:t>•  컨트롤 파일은 예외다. </a:t>
+            </a:r>
+            <a:r>
+              <a:rPr sz="1600" b="0">
+                <a:solidFill>
+                  <a:srgbClr val="222222"/>
+                </a:solidFill>
+                <a:latin typeface="Consolas"/>
+                <a:cs typeface="Consolas"/>
+              </a:rPr>
+              <a:t>CONTROL_FILES</a:t>
+            </a:r>
+            <a:r>
+              <a:rPr sz="1600" b="0">
+                <a:solidFill>
+                  <a:srgbClr val="222222"/>
+                </a:solidFill>
+                <a:latin typeface="맑은 고딕"/>
+              </a:rPr>
+              <a:t>가 상속되어 Standby에 </a:t>
+            </a:r>
+            <a:r>
+              <a:rPr sz="1600" b="0">
+                <a:solidFill>
+                  <a:srgbClr val="222222"/>
+                </a:solidFill>
+                <a:latin typeface="Consolas"/>
+                <a:cs typeface="Consolas"/>
+              </a:rPr>
+              <a:t>Chicago</a:t>
+            </a:r>
+            <a:r>
+              <a:rPr sz="1600" b="0">
+                <a:solidFill>
+                  <a:srgbClr val="222222"/>
+                </a:solidFill>
+                <a:latin typeface="맑은 고딕"/>
+              </a:rPr>
+              <a:t>·</a:t>
+            </a:r>
+            <a:r>
+              <a:rPr sz="1600" b="0">
+                <a:solidFill>
+                  <a:srgbClr val="222222"/>
+                </a:solidFill>
+                <a:latin typeface="Consolas"/>
+                <a:cs typeface="Consolas"/>
+              </a:rPr>
+              <a:t>CHICAGO</a:t>
+            </a:r>
+            <a:r>
+              <a:rPr sz="1600" b="0">
+                <a:solidFill>
+                  <a:srgbClr val="222222"/>
+                </a:solidFill>
+                <a:latin typeface="맑은 고딕"/>
+              </a:rPr>
+              <a:t>가 생긴다.</a:t>
             </a:r>
           </a:p>
           <a:p>
@@ -12984,7 +14619,26 @@
                 </a:solidFill>
                 <a:latin typeface="맑은 고딕"/>
               </a:rPr>
-              <a:t>•  교정 순서는 SCOPE=SPFILE 변경 → 종료 → `mv` → 기동. 어기면 ORA-00205.</a:t>
+              <a:t>•  교정 순서는 SCOPE=SPFILE 변경 → 종료 → </a:t>
+            </a:r>
+            <a:r>
+              <a:rPr sz="1600" b="0">
+                <a:solidFill>
+                  <a:srgbClr val="222222"/>
+                </a:solidFill>
+                <a:latin typeface="Consolas"/>
+                <a:cs typeface="Consolas"/>
+              </a:rPr>
+              <a:t>mv</a:t>
+            </a:r>
+            <a:r>
+              <a:rPr sz="1600" b="0">
+                <a:solidFill>
+                  <a:srgbClr val="222222"/>
+                </a:solidFill>
+                <a:latin typeface="맑은 고딕"/>
+              </a:rPr>
+              <a:t> → 기동. 어기면 ORA-00205.</a:t>
             </a:r>
           </a:p>
           <a:p>
@@ -13000,7 +14654,26 @@
                 </a:solidFill>
                 <a:latin typeface="맑은 고딕"/>
               </a:rPr>
-              <a:t>•  가이드의 `create spfile from pfile`은 ORA-32002로 막힌다. 성공했다면 구성이 해체됐을 것이다.</a:t>
+              <a:t>•  가이드의 </a:t>
+            </a:r>
+            <a:r>
+              <a:rPr sz="1600" b="0">
+                <a:solidFill>
+                  <a:srgbClr val="222222"/>
+                </a:solidFill>
+                <a:latin typeface="Consolas"/>
+                <a:cs typeface="Consolas"/>
+              </a:rPr>
+              <a:t>create spfile from pfile</a:t>
+            </a:r>
+            <a:r>
+              <a:rPr sz="1600" b="0">
+                <a:solidFill>
+                  <a:srgbClr val="222222"/>
+                </a:solidFill>
+                <a:latin typeface="맑은 고딕"/>
+              </a:rPr>
+              <a:t>은 ORA-32002로 막힌다. 성공했다면 구성이 해체됐을 것이다.</a:t>
             </a:r>
           </a:p>
           <a:p>
@@ -13702,7 +15375,26 @@
                 </a:solidFill>
                 <a:latin typeface="맑은 고딕"/>
               </a:rPr>
-              <a:t>•  5장 두 번째 실패 — `pdbseed` 디렉터리가 없어 ORA-19505</a:t>
+              <a:t>•  5장 두 번째 실패 — </a:t>
+            </a:r>
+            <a:r>
+              <a:rPr sz="1700" b="0">
+                <a:solidFill>
+                  <a:srgbClr val="222222"/>
+                </a:solidFill>
+                <a:latin typeface="Consolas"/>
+                <a:cs typeface="Consolas"/>
+              </a:rPr>
+              <a:t>pdbseed</a:t>
+            </a:r>
+            <a:r>
+              <a:rPr sz="1700" b="0">
+                <a:solidFill>
+                  <a:srgbClr val="222222"/>
+                </a:solidFill>
+                <a:latin typeface="맑은 고딕"/>
+              </a:rPr>
+              <a:t> 디렉터리가 없어 ORA-19505</a:t>
             </a:r>
           </a:p>
           <a:p>
@@ -13929,7 +15621,36 @@
                 </a:solidFill>
                 <a:latin typeface="맑은 고딕"/>
               </a:rPr>
-              <a:t>•  `DB_CREATE_FILE_DEST` — 데이터·임시 파일. 실습 `/u03/app/oracle/oradata`</a:t>
+              <a:t>•  </a:t>
+            </a:r>
+            <a:r>
+              <a:rPr sz="1700" b="0">
+                <a:solidFill>
+                  <a:srgbClr val="222222"/>
+                </a:solidFill>
+                <a:latin typeface="Consolas"/>
+                <a:cs typeface="Consolas"/>
+              </a:rPr>
+              <a:t>DB_CREATE_FILE_DEST</a:t>
+            </a:r>
+            <a:r>
+              <a:rPr sz="1700" b="0">
+                <a:solidFill>
+                  <a:srgbClr val="222222"/>
+                </a:solidFill>
+                <a:latin typeface="맑은 고딕"/>
+              </a:rPr>
+              <a:t> — 데이터·임시 파일. 실습 </a:t>
+            </a:r>
+            <a:r>
+              <a:rPr sz="1700" b="0">
+                <a:solidFill>
+                  <a:srgbClr val="222222"/>
+                </a:solidFill>
+                <a:latin typeface="Consolas"/>
+                <a:cs typeface="Consolas"/>
+              </a:rPr>
+              <a:t>/u03/app/oracle/oradata</a:t>
             </a:r>
           </a:p>
           <a:p>
@@ -13945,7 +15666,35 @@
                 </a:solidFill>
                 <a:latin typeface="맑은 고딕"/>
               </a:rPr>
-              <a:t>•  `DB_CREATE_ONLINE_LOG_DEST_n` — 온라인 로그·컨트롤 파일. **미지정**</a:t>
+              <a:t>•  </a:t>
+            </a:r>
+            <a:r>
+              <a:rPr sz="1700" b="0">
+                <a:solidFill>
+                  <a:srgbClr val="222222"/>
+                </a:solidFill>
+                <a:latin typeface="Consolas"/>
+                <a:cs typeface="Consolas"/>
+              </a:rPr>
+              <a:t>DB_CREATE_ONLINE_LOG_DEST_n</a:t>
+            </a:r>
+            <a:r>
+              <a:rPr sz="1700" b="0">
+                <a:solidFill>
+                  <a:srgbClr val="222222"/>
+                </a:solidFill>
+                <a:latin typeface="맑은 고딕"/>
+              </a:rPr>
+              <a:t> — 온라인 로그·컨트롤 파일. </a:t>
+            </a:r>
+            <a:r>
+              <a:rPr sz="1700" b="1">
+                <a:solidFill>
+                  <a:srgbClr val="222222"/>
+                </a:solidFill>
+                <a:latin typeface="맑은 고딕"/>
+              </a:rPr>
+              <a:t>미지정</a:t>
             </a:r>
           </a:p>
           <a:p>
@@ -13961,7 +15710,26 @@
                 </a:solidFill>
                 <a:latin typeface="맑은 고딕"/>
               </a:rPr>
-              <a:t>•  `DB_RECOVERY_FILE_DEST` — FRA. 실습 15GB</a:t>
+              <a:t>•  </a:t>
+            </a:r>
+            <a:r>
+              <a:rPr sz="1700" b="0">
+                <a:solidFill>
+                  <a:srgbClr val="222222"/>
+                </a:solidFill>
+                <a:latin typeface="Consolas"/>
+                <a:cs typeface="Consolas"/>
+              </a:rPr>
+              <a:t>DB_RECOVERY_FILE_DEST</a:t>
+            </a:r>
+            <a:r>
+              <a:rPr sz="1700" b="0">
+                <a:solidFill>
+                  <a:srgbClr val="222222"/>
+                </a:solidFill>
+                <a:latin typeface="맑은 고딕"/>
+              </a:rPr>
+              <a:t> — FRA. 실습 15GB</a:t>
             </a:r>
           </a:p>
           <a:p>
@@ -13977,7 +15745,26 @@
                 </a:solidFill>
                 <a:latin typeface="맑은 고딕"/>
               </a:rPr>
-              <a:t>•  로그 목적지를 지정하지 않으면 `DB_CREATE_FILE_DEST` 아래로 간다</a:t>
+              <a:t>•  로그 목적지를 지정하지 않으면 </a:t>
+            </a:r>
+            <a:r>
+              <a:rPr sz="1700" b="0">
+                <a:solidFill>
+                  <a:srgbClr val="222222"/>
+                </a:solidFill>
+                <a:latin typeface="Consolas"/>
+                <a:cs typeface="Consolas"/>
+              </a:rPr>
+              <a:t>DB_CREATE_FILE_DEST</a:t>
+            </a:r>
+            <a:r>
+              <a:rPr sz="1700" b="0">
+                <a:solidFill>
+                  <a:srgbClr val="222222"/>
+                </a:solidFill>
+                <a:latin typeface="맑은 고딕"/>
+              </a:rPr>
+              <a:t> 아래로 간다</a:t>
             </a:r>
           </a:p>
         </p:txBody>
@@ -14156,7 +15943,26 @@
                 </a:solidFill>
                 <a:latin typeface="맑은 고딕"/>
               </a:rPr>
-              <a:t>•  `DB_CREATE_FILE_DEST`에 값이 있으면 그 이후 만들어지는 파일이 OMF</a:t>
+              <a:t>•  </a:t>
+            </a:r>
+            <a:r>
+              <a:rPr sz="1700" b="0">
+                <a:solidFill>
+                  <a:srgbClr val="222222"/>
+                </a:solidFill>
+                <a:latin typeface="Consolas"/>
+                <a:cs typeface="Consolas"/>
+              </a:rPr>
+              <a:t>DB_CREATE_FILE_DEST</a:t>
+            </a:r>
+            <a:r>
+              <a:rPr sz="1700" b="0">
+                <a:solidFill>
+                  <a:srgbClr val="222222"/>
+                </a:solidFill>
+                <a:latin typeface="맑은 고딕"/>
+              </a:rPr>
+              <a:t>에 값이 있으면 그 이후 만들어지는 파일이 OMF</a:t>
             </a:r>
           </a:p>
           <a:p>
@@ -14638,7 +16444,93 @@
                 </a:solidFill>
                 <a:latin typeface="맑은 고딕"/>
               </a:rPr>
-              <a:t>•  사라짐 : `parameter_value_convert` · `db_file_name_convert` · `log_file_name_convert` · `control_files` · `nofilenamecheck`</a:t>
+              <a:t>•  사라짐 : </a:t>
+            </a:r>
+            <a:r>
+              <a:rPr sz="1700" b="0">
+                <a:solidFill>
+                  <a:srgbClr val="222222"/>
+                </a:solidFill>
+                <a:latin typeface="Consolas"/>
+                <a:cs typeface="Consolas"/>
+              </a:rPr>
+              <a:t>parameter_value_convert</a:t>
+            </a:r>
+            <a:r>
+              <a:rPr sz="1700" b="0">
+                <a:solidFill>
+                  <a:srgbClr val="222222"/>
+                </a:solidFill>
+                <a:latin typeface="맑은 고딕"/>
+              </a:rPr>
+              <a:t> · </a:t>
+            </a:r>
+            <a:r>
+              <a:rPr sz="1700" b="0">
+                <a:solidFill>
+                  <a:srgbClr val="222222"/>
+                </a:solidFill>
+                <a:latin typeface="Consolas"/>
+                <a:cs typeface="Consolas"/>
+              </a:rPr>
+              <a:t>db_file_name_convert</a:t>
+            </a:r>
+            <a:r>
+              <a:rPr sz="1700" b="0">
+                <a:solidFill>
+                  <a:srgbClr val="222222"/>
+                </a:solidFill>
+                <a:latin typeface="맑은 고딕"/>
+              </a:rPr>
+              <a:t> · </a:t>
+            </a:r>
+            <a:r>
+              <a:rPr sz="1700" b="0">
+                <a:solidFill>
+                  <a:srgbClr val="222222"/>
+                </a:solidFill>
+                <a:latin typeface="Consolas"/>
+                <a:cs typeface="Consolas"/>
+              </a:rPr>
+              <a:t>log_file_name_convert</a:t>
+            </a:r>
+            <a:r>
+              <a:rPr sz="1700" b="0">
+                <a:solidFill>
+                  <a:srgbClr val="222222"/>
+                </a:solidFill>
+                <a:latin typeface="맑은 고딕"/>
+              </a:rPr>
+              <a:t> · </a:t>
+            </a:r>
+            <a:r>
+              <a:rPr sz="1700" b="0">
+                <a:solidFill>
+                  <a:srgbClr val="222222"/>
+                </a:solidFill>
+                <a:latin typeface="Consolas"/>
+                <a:cs typeface="Consolas"/>
+              </a:rPr>
+              <a:t>control_files</a:t>
+            </a:r>
+            <a:r>
+              <a:rPr sz="1700" b="0">
+                <a:solidFill>
+                  <a:srgbClr val="222222"/>
+                </a:solidFill>
+                <a:latin typeface="맑은 고딕"/>
+              </a:rPr>
+              <a:t> · </a:t>
+            </a:r>
+            <a:r>
+              <a:rPr sz="1700" b="0">
+                <a:solidFill>
+                  <a:srgbClr val="222222"/>
+                </a:solidFill>
+                <a:latin typeface="Consolas"/>
+                <a:cs typeface="Consolas"/>
+              </a:rPr>
+              <a:t>nofilenamecheck</a:t>
             </a:r>
           </a:p>
           <a:p>
@@ -14654,7 +16546,55 @@
                 </a:solidFill>
                 <a:latin typeface="맑은 고딕"/>
               </a:rPr>
-              <a:t>•  생김 : `db_create_file_dest` · `db_recovery_file_dest` · `db_recovery_file_dest_size`</a:t>
+              <a:t>•  생김 : </a:t>
+            </a:r>
+            <a:r>
+              <a:rPr sz="1700" b="0">
+                <a:solidFill>
+                  <a:srgbClr val="222222"/>
+                </a:solidFill>
+                <a:latin typeface="Consolas"/>
+                <a:cs typeface="Consolas"/>
+              </a:rPr>
+              <a:t>db_create_file_dest</a:t>
+            </a:r>
+            <a:r>
+              <a:rPr sz="1700" b="0">
+                <a:solidFill>
+                  <a:srgbClr val="222222"/>
+                </a:solidFill>
+                <a:latin typeface="맑은 고딕"/>
+              </a:rPr>
+              <a:t> · </a:t>
+            </a:r>
+            <a:r>
+              <a:rPr sz="1700" b="0">
+                <a:solidFill>
+                  <a:srgbClr val="222222"/>
+                </a:solidFill>
+                <a:latin typeface="Consolas"/>
+                <a:cs typeface="Consolas"/>
+              </a:rPr>
+              <a:t>db_recovery_file_dest</a:t>
+            </a:r>
+            <a:r>
+              <a:rPr sz="1700" b="0">
+                <a:solidFill>
+                  <a:srgbClr val="222222"/>
+                </a:solidFill>
+                <a:latin typeface="맑은 고딕"/>
+              </a:rPr>
+              <a:t> · </a:t>
+            </a:r>
+            <a:r>
+              <a:rPr sz="1700" b="0">
+                <a:solidFill>
+                  <a:srgbClr val="222222"/>
+                </a:solidFill>
+                <a:latin typeface="Consolas"/>
+                <a:cs typeface="Consolas"/>
+              </a:rPr>
+              <a:t>db_recovery_file_dest_size</a:t>
             </a:r>
           </a:p>
           <a:p>
@@ -14670,7 +16610,26 @@
                 </a:solidFill>
                 <a:latin typeface="맑은 고딕"/>
               </a:rPr>
-              <a:t>•  두 convert를 `db_create_file_dest` 하나가 대신한다</a:t>
+              <a:t>•  두 convert를 </a:t>
+            </a:r>
+            <a:r>
+              <a:rPr sz="1700" b="0">
+                <a:solidFill>
+                  <a:srgbClr val="222222"/>
+                </a:solidFill>
+                <a:latin typeface="Consolas"/>
+                <a:cs typeface="Consolas"/>
+              </a:rPr>
+              <a:t>db_create_file_dest</a:t>
+            </a:r>
+            <a:r>
+              <a:rPr sz="1700" b="0">
+                <a:solidFill>
+                  <a:srgbClr val="222222"/>
+                </a:solidFill>
+                <a:latin typeface="맑은 고딕"/>
+              </a:rPr>
+              <a:t> 하나가 대신한다</a:t>
             </a:r>
           </a:p>
           <a:p>
@@ -14686,7 +16645,44 @@
                 </a:solidFill>
                 <a:latin typeface="맑은 고딕"/>
               </a:rPr>
-              <a:t>•  `set control_files`만은 대신하는 것이 **없다** → 6.7절</a:t>
+              <a:t>•  </a:t>
+            </a:r>
+            <a:r>
+              <a:rPr sz="1700" b="0">
+                <a:solidFill>
+                  <a:srgbClr val="222222"/>
+                </a:solidFill>
+                <a:latin typeface="Consolas"/>
+                <a:cs typeface="Consolas"/>
+              </a:rPr>
+              <a:t>set control_files</a:t>
+            </a:r>
+            <a:r>
+              <a:rPr sz="1700" b="0">
+                <a:solidFill>
+                  <a:srgbClr val="222222"/>
+                </a:solidFill>
+                <a:latin typeface="맑은 고딕"/>
+              </a:rPr>
+              <a:t>만은 대신하는 것이 </a:t>
+            </a:r>
+            <a:r>
+              <a:rPr sz="1700" b="1">
+                <a:solidFill>
+                  <a:srgbClr val="222222"/>
+                </a:solidFill>
+                <a:latin typeface="맑은 고딕"/>
+              </a:rPr>
+              <a:t>없다</a:t>
+            </a:r>
+            <a:r>
+              <a:rPr sz="1700" b="0">
+                <a:solidFill>
+                  <a:srgbClr val="222222"/>
+                </a:solidFill>
+                <a:latin typeface="맑은 고딕"/>
+              </a:rPr>
+              <a:t> → 6.7절</a:t>
             </a:r>
           </a:p>
         </p:txBody>
